--- a/Generative Adversarial Networks.pptx
+++ b/Generative Adversarial Networks.pptx
@@ -5,17 +5,20 @@
     <p:sldMasterId id="2147483660" r:id="rId1"/>
   </p:sldMasterIdLst>
   <p:notesMasterIdLst>
-    <p:notesMasterId r:id="rId7"/>
+    <p:notesMasterId r:id="rId10"/>
   </p:notesMasterIdLst>
   <p:handoutMasterIdLst>
-    <p:handoutMasterId r:id="rId8"/>
+    <p:handoutMasterId r:id="rId11"/>
   </p:handoutMasterIdLst>
   <p:sldIdLst>
     <p:sldId id="256" r:id="rId2"/>
     <p:sldId id="1361" r:id="rId3"/>
-    <p:sldId id="1379" r:id="rId4"/>
-    <p:sldId id="1378" r:id="rId5"/>
-    <p:sldId id="1380" r:id="rId6"/>
+    <p:sldId id="1381" r:id="rId4"/>
+    <p:sldId id="1382" r:id="rId5"/>
+    <p:sldId id="1383" r:id="rId6"/>
+    <p:sldId id="1379" r:id="rId7"/>
+    <p:sldId id="1378" r:id="rId8"/>
+    <p:sldId id="1380" r:id="rId9"/>
   </p:sldIdLst>
   <p:sldSz cx="12192000" cy="6858000"/>
   <p:notesSz cx="6858000" cy="9144000"/>
@@ -125,6 +128,9 @@
         <p14:section name="디자인, 모핑, 주석 달기, 공동 작업, 입력하세요" id="{B9B51309-D148-4332-87C2-07BE32FBCA3B}">
           <p14:sldIdLst>
             <p14:sldId id="1361"/>
+            <p14:sldId id="1381"/>
+            <p14:sldId id="1382"/>
+            <p14:sldId id="1383"/>
             <p14:sldId id="1379"/>
             <p14:sldId id="1378"/>
             <p14:sldId id="1380"/>
@@ -252,7 +258,7 @@
                 <a:latin typeface="맑은 고딕" panose="020B0503020000020004" pitchFamily="50" charset="-127"/>
                 <a:ea typeface="맑은 고딕" panose="020B0503020000020004" pitchFamily="50" charset="-127"/>
               </a:rPr>
-              <a:t>2026-09-06</a:t>
+              <a:t>2026-09-07</a:t>
             </a:fld>
             <a:endParaRPr lang="ko-KR" altLang="en-US">
               <a:latin typeface="맑은 고딕" panose="020B0503020000020004" pitchFamily="50" charset="-127"/>
@@ -438,7 +444,7 @@
           <a:p>
             <a:fld id="{43E1C3DD-4A19-441D-907C-380838DB51C4}" type="datetime1">
               <a:rPr lang="ko-KR" altLang="en-US" noProof="0" smtClean="0"/>
-              <a:t>2026-09-06</a:t>
+              <a:t>2026-09-07</a:t>
             </a:fld>
             <a:endParaRPr lang="ko-KR" altLang="en-US" noProof="0"/>
           </a:p>
@@ -1410,7 +1416,7 @@
           <a:p>
             <a:fld id="{990475B5-67CA-4281-BDCA-DA943C3C8EB3}" type="datetime1">
               <a:rPr lang="ko-KR" altLang="en-US" noProof="0" smtClean="0"/>
-              <a:t>2026-09-06</a:t>
+              <a:t>2026-09-07</a:t>
             </a:fld>
             <a:endParaRPr lang="ko-KR" altLang="en-US" noProof="0"/>
           </a:p>
@@ -2064,7 +2070,7 @@
           <a:p>
             <a:fld id="{48A87A34-81AB-432B-8DAE-1953F412C126}" type="datetimeFigureOut">
               <a:rPr lang="en-US" smtClean="0"/>
-              <a:t>9/6/2026</a:t>
+              <a:t>9/7/2026</a:t>
             </a:fld>
             <a:endParaRPr lang="en-US" dirty="0"/>
           </a:p>
@@ -2360,7 +2366,7 @@
           <a:p>
             <a:fld id="{C655C81E-72E7-4D05-94B5-F45B321A525D}" type="datetime1">
               <a:rPr lang="ko-KR" altLang="en-US" noProof="0" smtClean="0"/>
-              <a:t>2026-09-06</a:t>
+              <a:t>2026-09-07</a:t>
             </a:fld>
             <a:endParaRPr lang="ko-KR" altLang="en-US" noProof="0" dirty="0">
               <a:latin typeface="맑은 고딕" panose="020B0503020000020004" pitchFamily="50" charset="-127"/>
@@ -3255,6 +3261,2675 @@
         <p:cNvPr id="1" name="">
           <a:extLst>
             <a:ext uri="{FF2B5EF4-FFF2-40B4-BE49-F238E27FC236}">
+              <a16:creationId xmlns:a16="http://schemas.microsoft.com/office/drawing/2014/main" id="{0840C477-FAF6-C939-BE0A-0ADDE82F58B2}"/>
+            </a:ext>
+          </a:extLst>
+        </p:cNvPr>
+        <p:cNvGrpSpPr/>
+        <p:nvPr/>
+      </p:nvGrpSpPr>
+      <p:grpSpPr>
+        <a:xfrm>
+          <a:off x="0" y="0"/>
+          <a:ext cx="0" cy="0"/>
+          <a:chOff x="0" y="0"/>
+          <a:chExt cx="0" cy="0"/>
+        </a:xfrm>
+      </p:grpSpPr>
+      <p:sp>
+        <p:nvSpPr>
+          <p:cNvPr id="3" name="제목 1">
+            <a:extLst>
+              <a:ext uri="{FF2B5EF4-FFF2-40B4-BE49-F238E27FC236}">
+                <a16:creationId xmlns:a16="http://schemas.microsoft.com/office/drawing/2014/main" id="{D8A9D857-46BC-CE7A-4245-A846A5DFE8DF}"/>
+              </a:ext>
+            </a:extLst>
+          </p:cNvPr>
+          <p:cNvSpPr txBox="1">
+            <a:spLocks/>
+          </p:cNvSpPr>
+          <p:nvPr/>
+        </p:nvSpPr>
+        <p:spPr>
+          <a:xfrm>
+            <a:off x="475645" y="481983"/>
+            <a:ext cx="10353762" cy="766439"/>
+          </a:xfrm>
+          <a:prstGeom prst="rect">
+            <a:avLst/>
+          </a:prstGeom>
+        </p:spPr>
+        <p:txBody>
+          <a:bodyPr vert="horz" lIns="91440" tIns="45720" rIns="91440" bIns="45720" rtlCol="0" anchor="ctr">
+            <a:normAutofit/>
+          </a:bodyPr>
+          <a:lstStyle>
+            <a:lvl1pPr algn="ctr" defTabSz="914400" rtl="0" eaLnBrk="1" latinLnBrk="1" hangingPunct="1">
+              <a:lnSpc>
+                <a:spcPct val="90000"/>
+              </a:lnSpc>
+              <a:spcBef>
+                <a:spcPct val="0"/>
+              </a:spcBef>
+              <a:buNone/>
+              <a:defRPr sz="3200" kern="1200" cap="all" baseline="0">
+                <a:solidFill>
+                  <a:schemeClr val="tx1"/>
+                </a:solidFill>
+                <a:effectLst/>
+                <a:latin typeface="Batang" panose="02030600000101010101" pitchFamily="18" charset="-127"/>
+                <a:ea typeface="Batang" panose="02030600000101010101" pitchFamily="18" charset="-127"/>
+                <a:cs typeface="+mj-cs"/>
+              </a:defRPr>
+            </a:lvl1pPr>
+          </a:lstStyle>
+          <a:p>
+            <a:pPr algn="l"/>
+            <a:r>
+              <a:rPr lang="en-US" altLang="ko-KR" sz="2800" cap="none" dirty="0">
+                <a:solidFill>
+                  <a:schemeClr val="bg2">
+                    <a:lumMod val="25000"/>
+                  </a:schemeClr>
+                </a:solidFill>
+                <a:latin typeface="D2Coding" panose="020B0609020101020101" pitchFamily="49" charset="-127"/>
+                <a:ea typeface="D2Coding" panose="020B0609020101020101" pitchFamily="49" charset="-127"/>
+                <a:cs typeface="Segoe UI Light" panose="020B0502040204020203" pitchFamily="34" charset="0"/>
+              </a:rPr>
+              <a:t>Data</a:t>
+            </a:r>
+            <a:r>
+              <a:rPr lang="ko-KR" altLang="en-US" sz="2800" cap="none" dirty="0">
+                <a:solidFill>
+                  <a:schemeClr val="bg2">
+                    <a:lumMod val="25000"/>
+                  </a:schemeClr>
+                </a:solidFill>
+                <a:latin typeface="D2Coding" panose="020B0609020101020101" pitchFamily="49" charset="-127"/>
+                <a:ea typeface="D2Coding" panose="020B0609020101020101" pitchFamily="49" charset="-127"/>
+                <a:cs typeface="Segoe UI Light" panose="020B0502040204020203" pitchFamily="34" charset="0"/>
+              </a:rPr>
+              <a:t> </a:t>
+            </a:r>
+            <a:r>
+              <a:rPr lang="en-US" altLang="ko-KR" sz="2800" cap="none" dirty="0">
+                <a:solidFill>
+                  <a:schemeClr val="bg2">
+                    <a:lumMod val="25000"/>
+                  </a:schemeClr>
+                </a:solidFill>
+                <a:latin typeface="D2Coding" panose="020B0609020101020101" pitchFamily="49" charset="-127"/>
+                <a:ea typeface="D2Coding" panose="020B0609020101020101" pitchFamily="49" charset="-127"/>
+                <a:cs typeface="Segoe UI Light" panose="020B0502040204020203" pitchFamily="34" charset="0"/>
+              </a:rPr>
+              <a:t>for your first GAN</a:t>
+            </a:r>
+            <a:endParaRPr lang="ko-KR" altLang="en-US" sz="2800" cap="none" dirty="0">
+              <a:solidFill>
+                <a:schemeClr val="bg2">
+                  <a:lumMod val="25000"/>
+                </a:schemeClr>
+              </a:solidFill>
+              <a:latin typeface="D2Coding" panose="020B0609020101020101" pitchFamily="49" charset="-127"/>
+              <a:ea typeface="D2Coding" panose="020B0609020101020101" pitchFamily="49" charset="-127"/>
+              <a:cs typeface="Segoe UI Light" panose="020B0502040204020203" pitchFamily="34" charset="0"/>
+            </a:endParaRPr>
+          </a:p>
+        </p:txBody>
+      </p:sp>
+      <p:sp>
+        <p:nvSpPr>
+          <p:cNvPr id="2" name="TextBox 1">
+            <a:extLst>
+              <a:ext uri="{FF2B5EF4-FFF2-40B4-BE49-F238E27FC236}">
+                <a16:creationId xmlns:a16="http://schemas.microsoft.com/office/drawing/2014/main" id="{A0FC8BDC-571A-FAA4-7695-F31D8520DA39}"/>
+              </a:ext>
+            </a:extLst>
+          </p:cNvPr>
+          <p:cNvSpPr txBox="1"/>
+          <p:nvPr/>
+        </p:nvSpPr>
+        <p:spPr>
+          <a:xfrm>
+            <a:off x="563419" y="1487055"/>
+            <a:ext cx="6237605" cy="338554"/>
+          </a:xfrm>
+          <a:prstGeom prst="rect">
+            <a:avLst/>
+          </a:prstGeom>
+          <a:noFill/>
+        </p:spPr>
+        <p:txBody>
+          <a:bodyPr wrap="none" rtlCol="0">
+            <a:spAutoFit/>
+          </a:bodyPr>
+          <a:lstStyle/>
+          <a:p>
+            <a:r>
+              <a:rPr lang="ko-KR" altLang="en-US" sz="1600" dirty="0">
+                <a:latin typeface="D2Coding" panose="020B0609020101020101" pitchFamily="49" charset="-127"/>
+                <a:ea typeface="D2Coding" panose="020B0609020101020101" pitchFamily="49" charset="-127"/>
+                <a:hlinkClick r:id="rId2"/>
+              </a:rPr>
+              <a:t>구글의 </a:t>
+            </a:r>
+            <a:r>
+              <a:rPr lang="en-US" altLang="ko-KR" sz="1600" dirty="0">
+                <a:latin typeface="D2Coding" panose="020B0609020101020101" pitchFamily="49" charset="-127"/>
+                <a:ea typeface="D2Coding" panose="020B0609020101020101" pitchFamily="49" charset="-127"/>
+                <a:hlinkClick r:id="rId2"/>
+              </a:rPr>
+              <a:t>AI </a:t>
+            </a:r>
+            <a:r>
+              <a:rPr lang="ko-KR" altLang="en-US" sz="1600" dirty="0">
+                <a:latin typeface="D2Coding" panose="020B0609020101020101" pitchFamily="49" charset="-127"/>
+                <a:ea typeface="D2Coding" panose="020B0609020101020101" pitchFamily="49" charset="-127"/>
+                <a:hlinkClick r:id="rId2"/>
+              </a:rPr>
+              <a:t>낙서 맞추기 게임인 </a:t>
+            </a:r>
+            <a:r>
+              <a:rPr lang="en-US" altLang="ko-KR" sz="1600" dirty="0">
+                <a:latin typeface="D2Coding" panose="020B0609020101020101" pitchFamily="49" charset="-127"/>
+                <a:ea typeface="D2Coding" panose="020B0609020101020101" pitchFamily="49" charset="-127"/>
+                <a:hlinkClick r:id="rId2"/>
+              </a:rPr>
+              <a:t>'Quick, Draw!'</a:t>
+            </a:r>
+            <a:r>
+              <a:rPr lang="ko-KR" altLang="en-US" sz="1600" dirty="0">
+                <a:latin typeface="D2Coding" panose="020B0609020101020101" pitchFamily="49" charset="-127"/>
+                <a:ea typeface="D2Coding" panose="020B0609020101020101" pitchFamily="49" charset="-127"/>
+                <a:hlinkClick r:id="rId2"/>
+              </a:rPr>
+              <a:t>의 공개 데이터셋</a:t>
+            </a:r>
+            <a:endParaRPr lang="ko-KR" altLang="en-US" sz="1600" dirty="0">
+              <a:latin typeface="D2Coding" panose="020B0609020101020101" pitchFamily="49" charset="-127"/>
+              <a:ea typeface="D2Coding" panose="020B0609020101020101" pitchFamily="49" charset="-127"/>
+            </a:endParaRPr>
+          </a:p>
+        </p:txBody>
+      </p:sp>
+      <p:pic>
+        <p:nvPicPr>
+          <p:cNvPr id="7" name="그림 6">
+            <a:extLst>
+              <a:ext uri="{FF2B5EF4-FFF2-40B4-BE49-F238E27FC236}">
+                <a16:creationId xmlns:a16="http://schemas.microsoft.com/office/drawing/2014/main" id="{CD9C5AFC-633A-1B7F-EA33-55382DCD3885}"/>
+              </a:ext>
+            </a:extLst>
+          </p:cNvPr>
+          <p:cNvPicPr>
+            <a:picLocks noChangeAspect="1"/>
+          </p:cNvPicPr>
+          <p:nvPr/>
+        </p:nvPicPr>
+        <p:blipFill>
+          <a:blip r:embed="rId3"/>
+          <a:stretch>
+            <a:fillRect/>
+          </a:stretch>
+        </p:blipFill>
+        <p:spPr>
+          <a:xfrm>
+            <a:off x="674254" y="2064242"/>
+            <a:ext cx="6844145" cy="3499897"/>
+          </a:xfrm>
+          <a:prstGeom prst="rect">
+            <a:avLst/>
+          </a:prstGeom>
+          <a:ln>
+            <a:solidFill>
+              <a:schemeClr val="tx1"/>
+            </a:solidFill>
+          </a:ln>
+        </p:spPr>
+      </p:pic>
+      <p:pic>
+        <p:nvPicPr>
+          <p:cNvPr id="9" name="그림 8">
+            <a:extLst>
+              <a:ext uri="{FF2B5EF4-FFF2-40B4-BE49-F238E27FC236}">
+                <a16:creationId xmlns:a16="http://schemas.microsoft.com/office/drawing/2014/main" id="{33AA859B-C65E-ACFF-042B-B74698A255EA}"/>
+              </a:ext>
+            </a:extLst>
+          </p:cNvPr>
+          <p:cNvPicPr>
+            <a:picLocks noChangeAspect="1"/>
+          </p:cNvPicPr>
+          <p:nvPr/>
+        </p:nvPicPr>
+        <p:blipFill>
+          <a:blip r:embed="rId4"/>
+          <a:stretch>
+            <a:fillRect/>
+          </a:stretch>
+        </p:blipFill>
+        <p:spPr>
+          <a:xfrm>
+            <a:off x="5777802" y="4295343"/>
+            <a:ext cx="5739944" cy="2080674"/>
+          </a:xfrm>
+          <a:prstGeom prst="rect">
+            <a:avLst/>
+          </a:prstGeom>
+          <a:ln>
+            <a:solidFill>
+              <a:schemeClr val="tx1"/>
+            </a:solidFill>
+          </a:ln>
+        </p:spPr>
+      </p:pic>
+    </p:spTree>
+    <p:extLst>
+      <p:ext uri="{BB962C8B-B14F-4D97-AF65-F5344CB8AC3E}">
+        <p14:creationId xmlns:p14="http://schemas.microsoft.com/office/powerpoint/2010/main" val="179655886"/>
+      </p:ext>
+    </p:extLst>
+  </p:cSld>
+  <p:clrMapOvr>
+    <a:masterClrMapping/>
+  </p:clrMapOvr>
+</p:sld>
+</file>
+
+<file path=ppt/slides/slide4.xml><?xml version="1.0" encoding="utf-8"?>
+<p:sld xmlns:a="http://schemas.openxmlformats.org/drawingml/2006/main" xmlns:r="http://schemas.openxmlformats.org/officeDocument/2006/relationships" xmlns:p="http://schemas.openxmlformats.org/presentationml/2006/main">
+  <p:cSld>
+    <p:spTree>
+      <p:nvGrpSpPr>
+        <p:cNvPr id="1" name="">
+          <a:extLst>
+            <a:ext uri="{FF2B5EF4-FFF2-40B4-BE49-F238E27FC236}">
+              <a16:creationId xmlns:a16="http://schemas.microsoft.com/office/drawing/2014/main" id="{ECAD1651-62A0-B2E1-BA40-0B2DB2E3DD38}"/>
+            </a:ext>
+          </a:extLst>
+        </p:cNvPr>
+        <p:cNvGrpSpPr/>
+        <p:nvPr/>
+      </p:nvGrpSpPr>
+      <p:grpSpPr>
+        <a:xfrm>
+          <a:off x="0" y="0"/>
+          <a:ext cx="0" cy="0"/>
+          <a:chOff x="0" y="0"/>
+          <a:chExt cx="0" cy="0"/>
+        </a:xfrm>
+      </p:grpSpPr>
+      <p:sp>
+        <p:nvSpPr>
+          <p:cNvPr id="3" name="제목 1">
+            <a:extLst>
+              <a:ext uri="{FF2B5EF4-FFF2-40B4-BE49-F238E27FC236}">
+                <a16:creationId xmlns:a16="http://schemas.microsoft.com/office/drawing/2014/main" id="{4F9AEED5-E3D3-AF46-C77A-4E62B140D943}"/>
+              </a:ext>
+            </a:extLst>
+          </p:cNvPr>
+          <p:cNvSpPr txBox="1">
+            <a:spLocks/>
+          </p:cNvSpPr>
+          <p:nvPr/>
+        </p:nvSpPr>
+        <p:spPr>
+          <a:xfrm>
+            <a:off x="475645" y="481983"/>
+            <a:ext cx="10353762" cy="766439"/>
+          </a:xfrm>
+          <a:prstGeom prst="rect">
+            <a:avLst/>
+          </a:prstGeom>
+        </p:spPr>
+        <p:txBody>
+          <a:bodyPr vert="horz" lIns="91440" tIns="45720" rIns="91440" bIns="45720" rtlCol="0" anchor="ctr">
+            <a:normAutofit/>
+          </a:bodyPr>
+          <a:lstStyle>
+            <a:lvl1pPr algn="ctr" defTabSz="914400" rtl="0" eaLnBrk="1" latinLnBrk="1" hangingPunct="1">
+              <a:lnSpc>
+                <a:spcPct val="90000"/>
+              </a:lnSpc>
+              <a:spcBef>
+                <a:spcPct val="0"/>
+              </a:spcBef>
+              <a:buNone/>
+              <a:defRPr sz="3200" kern="1200" cap="all" baseline="0">
+                <a:solidFill>
+                  <a:schemeClr val="tx1"/>
+                </a:solidFill>
+                <a:effectLst/>
+                <a:latin typeface="Batang" panose="02030600000101010101" pitchFamily="18" charset="-127"/>
+                <a:ea typeface="Batang" panose="02030600000101010101" pitchFamily="18" charset="-127"/>
+                <a:cs typeface="+mj-cs"/>
+              </a:defRPr>
+            </a:lvl1pPr>
+          </a:lstStyle>
+          <a:p>
+            <a:pPr algn="l"/>
+            <a:r>
+              <a:rPr lang="en-US" altLang="ko-KR" sz="2800" cap="none" dirty="0">
+                <a:solidFill>
+                  <a:schemeClr val="bg2">
+                    <a:lumMod val="25000"/>
+                  </a:schemeClr>
+                </a:solidFill>
+                <a:latin typeface="D2Coding" panose="020B0609020101020101" pitchFamily="49" charset="-127"/>
+                <a:ea typeface="D2Coding" panose="020B0609020101020101" pitchFamily="49" charset="-127"/>
+                <a:cs typeface="Segoe UI Light" panose="020B0502040204020203" pitchFamily="34" charset="0"/>
+              </a:rPr>
+              <a:t>Data</a:t>
+            </a:r>
+            <a:r>
+              <a:rPr lang="ko-KR" altLang="en-US" sz="2800" cap="none" dirty="0">
+                <a:solidFill>
+                  <a:schemeClr val="bg2">
+                    <a:lumMod val="25000"/>
+                  </a:schemeClr>
+                </a:solidFill>
+                <a:latin typeface="D2Coding" panose="020B0609020101020101" pitchFamily="49" charset="-127"/>
+                <a:ea typeface="D2Coding" panose="020B0609020101020101" pitchFamily="49" charset="-127"/>
+                <a:cs typeface="Segoe UI Light" panose="020B0502040204020203" pitchFamily="34" charset="0"/>
+              </a:rPr>
+              <a:t> </a:t>
+            </a:r>
+            <a:r>
+              <a:rPr lang="en-US" altLang="ko-KR" sz="2800" cap="none" dirty="0">
+                <a:solidFill>
+                  <a:schemeClr val="bg2">
+                    <a:lumMod val="25000"/>
+                  </a:schemeClr>
+                </a:solidFill>
+                <a:latin typeface="D2Coding" panose="020B0609020101020101" pitchFamily="49" charset="-127"/>
+                <a:ea typeface="D2Coding" panose="020B0609020101020101" pitchFamily="49" charset="-127"/>
+                <a:cs typeface="Segoe UI Light" panose="020B0502040204020203" pitchFamily="34" charset="0"/>
+              </a:rPr>
+              <a:t>for your first GAN</a:t>
+            </a:r>
+            <a:endParaRPr lang="ko-KR" altLang="en-US" sz="2800" cap="none" dirty="0">
+              <a:solidFill>
+                <a:schemeClr val="bg2">
+                  <a:lumMod val="25000"/>
+                </a:schemeClr>
+              </a:solidFill>
+              <a:latin typeface="D2Coding" panose="020B0609020101020101" pitchFamily="49" charset="-127"/>
+              <a:ea typeface="D2Coding" panose="020B0609020101020101" pitchFamily="49" charset="-127"/>
+              <a:cs typeface="Segoe UI Light" panose="020B0502040204020203" pitchFamily="34" charset="0"/>
+            </a:endParaRPr>
+          </a:p>
+        </p:txBody>
+      </p:sp>
+      <p:sp>
+        <p:nvSpPr>
+          <p:cNvPr id="5" name="TextBox 4">
+            <a:extLst>
+              <a:ext uri="{FF2B5EF4-FFF2-40B4-BE49-F238E27FC236}">
+                <a16:creationId xmlns:a16="http://schemas.microsoft.com/office/drawing/2014/main" id="{4E872E1D-499B-AAC2-92C4-60A3E4959C32}"/>
+              </a:ext>
+            </a:extLst>
+          </p:cNvPr>
+          <p:cNvSpPr txBox="1"/>
+          <p:nvPr/>
+        </p:nvSpPr>
+        <p:spPr>
+          <a:xfrm>
+            <a:off x="614218" y="1639885"/>
+            <a:ext cx="10940474" cy="3108543"/>
+          </a:xfrm>
+          <a:prstGeom prst="rect">
+            <a:avLst/>
+          </a:prstGeom>
+          <a:solidFill>
+            <a:schemeClr val="tx1"/>
+          </a:solidFill>
+        </p:spPr>
+        <p:txBody>
+          <a:bodyPr wrap="square">
+            <a:spAutoFit/>
+          </a:bodyPr>
+          <a:lstStyle/>
+          <a:p>
+            <a:r>
+              <a:rPr lang="ko-KR" altLang="en-US" sz="1400" dirty="0">
+                <a:solidFill>
+                  <a:schemeClr val="bg1"/>
+                </a:solidFill>
+                <a:latin typeface="D2Coding" panose="020B0609020101020101" pitchFamily="49" charset="-127"/>
+                <a:ea typeface="D2Coding" panose="020B0609020101020101" pitchFamily="49" charset="-127"/>
+              </a:rPr>
+              <a:t>D:\&gt;curl -</a:t>
+            </a:r>
+            <a:r>
+              <a:rPr lang="ko-KR" altLang="en-US" sz="1400" dirty="0" err="1">
+                <a:solidFill>
+                  <a:schemeClr val="bg1"/>
+                </a:solidFill>
+                <a:latin typeface="D2Coding" panose="020B0609020101020101" pitchFamily="49" charset="-127"/>
+                <a:ea typeface="D2Coding" panose="020B0609020101020101" pitchFamily="49" charset="-127"/>
+              </a:rPr>
+              <a:t>O</a:t>
+            </a:r>
+            <a:r>
+              <a:rPr lang="ko-KR" altLang="en-US" sz="1400" dirty="0">
+                <a:solidFill>
+                  <a:schemeClr val="bg1"/>
+                </a:solidFill>
+                <a:latin typeface="D2Coding" panose="020B0609020101020101" pitchFamily="49" charset="-127"/>
+                <a:ea typeface="D2Coding" panose="020B0609020101020101" pitchFamily="49" charset="-127"/>
+              </a:rPr>
+              <a:t> https://storage.googleapis.com/quickdraw_dataset/full/numpy_bitmap/camel.npy</a:t>
+            </a:r>
+          </a:p>
+          <a:p>
+            <a:r>
+              <a:rPr lang="ko-KR" altLang="en-US" sz="1400" dirty="0">
+                <a:solidFill>
+                  <a:schemeClr val="bg1">
+                    <a:lumMod val="75000"/>
+                  </a:schemeClr>
+                </a:solidFill>
+                <a:latin typeface="D2Coding" panose="020B0609020101020101" pitchFamily="49" charset="-127"/>
+                <a:ea typeface="D2Coding" panose="020B0609020101020101" pitchFamily="49" charset="-127"/>
+              </a:rPr>
+              <a:t>  % </a:t>
+            </a:r>
+            <a:r>
+              <a:rPr lang="ko-KR" altLang="en-US" sz="1400" dirty="0" err="1">
+                <a:solidFill>
+                  <a:schemeClr val="bg1">
+                    <a:lumMod val="75000"/>
+                  </a:schemeClr>
+                </a:solidFill>
+                <a:latin typeface="D2Coding" panose="020B0609020101020101" pitchFamily="49" charset="-127"/>
+                <a:ea typeface="D2Coding" panose="020B0609020101020101" pitchFamily="49" charset="-127"/>
+              </a:rPr>
+              <a:t>Total</a:t>
+            </a:r>
+            <a:r>
+              <a:rPr lang="ko-KR" altLang="en-US" sz="1400" dirty="0">
+                <a:solidFill>
+                  <a:schemeClr val="bg1">
+                    <a:lumMod val="75000"/>
+                  </a:schemeClr>
+                </a:solidFill>
+                <a:latin typeface="D2Coding" panose="020B0609020101020101" pitchFamily="49" charset="-127"/>
+                <a:ea typeface="D2Coding" panose="020B0609020101020101" pitchFamily="49" charset="-127"/>
+              </a:rPr>
+              <a:t>    % </a:t>
+            </a:r>
+            <a:r>
+              <a:rPr lang="ko-KR" altLang="en-US" sz="1400" dirty="0" err="1">
+                <a:solidFill>
+                  <a:schemeClr val="bg1">
+                    <a:lumMod val="75000"/>
+                  </a:schemeClr>
+                </a:solidFill>
+                <a:latin typeface="D2Coding" panose="020B0609020101020101" pitchFamily="49" charset="-127"/>
+                <a:ea typeface="D2Coding" panose="020B0609020101020101" pitchFamily="49" charset="-127"/>
+              </a:rPr>
+              <a:t>Received</a:t>
+            </a:r>
+            <a:r>
+              <a:rPr lang="ko-KR" altLang="en-US" sz="1400" dirty="0">
+                <a:solidFill>
+                  <a:schemeClr val="bg1">
+                    <a:lumMod val="75000"/>
+                  </a:schemeClr>
+                </a:solidFill>
+                <a:latin typeface="D2Coding" panose="020B0609020101020101" pitchFamily="49" charset="-127"/>
+                <a:ea typeface="D2Coding" panose="020B0609020101020101" pitchFamily="49" charset="-127"/>
+              </a:rPr>
+              <a:t> % </a:t>
+            </a:r>
+            <a:r>
+              <a:rPr lang="ko-KR" altLang="en-US" sz="1400" dirty="0" err="1">
+                <a:solidFill>
+                  <a:schemeClr val="bg1">
+                    <a:lumMod val="75000"/>
+                  </a:schemeClr>
+                </a:solidFill>
+                <a:latin typeface="D2Coding" panose="020B0609020101020101" pitchFamily="49" charset="-127"/>
+                <a:ea typeface="D2Coding" panose="020B0609020101020101" pitchFamily="49" charset="-127"/>
+              </a:rPr>
+              <a:t>Xferd</a:t>
+            </a:r>
+            <a:r>
+              <a:rPr lang="ko-KR" altLang="en-US" sz="1400" dirty="0">
+                <a:solidFill>
+                  <a:schemeClr val="bg1">
+                    <a:lumMod val="75000"/>
+                  </a:schemeClr>
+                </a:solidFill>
+                <a:latin typeface="D2Coding" panose="020B0609020101020101" pitchFamily="49" charset="-127"/>
+                <a:ea typeface="D2Coding" panose="020B0609020101020101" pitchFamily="49" charset="-127"/>
+              </a:rPr>
+              <a:t>  </a:t>
+            </a:r>
+            <a:r>
+              <a:rPr lang="ko-KR" altLang="en-US" sz="1400" dirty="0" err="1">
+                <a:solidFill>
+                  <a:schemeClr val="bg1">
+                    <a:lumMod val="75000"/>
+                  </a:schemeClr>
+                </a:solidFill>
+                <a:latin typeface="D2Coding" panose="020B0609020101020101" pitchFamily="49" charset="-127"/>
+                <a:ea typeface="D2Coding" panose="020B0609020101020101" pitchFamily="49" charset="-127"/>
+              </a:rPr>
+              <a:t>Average</a:t>
+            </a:r>
+            <a:r>
+              <a:rPr lang="ko-KR" altLang="en-US" sz="1400" dirty="0">
+                <a:solidFill>
+                  <a:schemeClr val="bg1">
+                    <a:lumMod val="75000"/>
+                  </a:schemeClr>
+                </a:solidFill>
+                <a:latin typeface="D2Coding" panose="020B0609020101020101" pitchFamily="49" charset="-127"/>
+                <a:ea typeface="D2Coding" panose="020B0609020101020101" pitchFamily="49" charset="-127"/>
+              </a:rPr>
+              <a:t> </a:t>
+            </a:r>
+            <a:r>
+              <a:rPr lang="ko-KR" altLang="en-US" sz="1400" dirty="0" err="1">
+                <a:solidFill>
+                  <a:schemeClr val="bg1">
+                    <a:lumMod val="75000"/>
+                  </a:schemeClr>
+                </a:solidFill>
+                <a:latin typeface="D2Coding" panose="020B0609020101020101" pitchFamily="49" charset="-127"/>
+                <a:ea typeface="D2Coding" panose="020B0609020101020101" pitchFamily="49" charset="-127"/>
+              </a:rPr>
+              <a:t>Speed</a:t>
+            </a:r>
+            <a:r>
+              <a:rPr lang="ko-KR" altLang="en-US" sz="1400" dirty="0">
+                <a:solidFill>
+                  <a:schemeClr val="bg1">
+                    <a:lumMod val="75000"/>
+                  </a:schemeClr>
+                </a:solidFill>
+                <a:latin typeface="D2Coding" panose="020B0609020101020101" pitchFamily="49" charset="-127"/>
+                <a:ea typeface="D2Coding" panose="020B0609020101020101" pitchFamily="49" charset="-127"/>
+              </a:rPr>
+              <a:t>  Time    Time    Time   </a:t>
+            </a:r>
+            <a:r>
+              <a:rPr lang="ko-KR" altLang="en-US" sz="1400" dirty="0" err="1">
+                <a:solidFill>
+                  <a:schemeClr val="bg1">
+                    <a:lumMod val="75000"/>
+                  </a:schemeClr>
+                </a:solidFill>
+                <a:latin typeface="D2Coding" panose="020B0609020101020101" pitchFamily="49" charset="-127"/>
+                <a:ea typeface="D2Coding" panose="020B0609020101020101" pitchFamily="49" charset="-127"/>
+              </a:rPr>
+              <a:t>Current</a:t>
+            </a:r>
+            <a:endParaRPr lang="ko-KR" altLang="en-US" sz="1400" dirty="0">
+              <a:solidFill>
+                <a:schemeClr val="bg1">
+                  <a:lumMod val="75000"/>
+                </a:schemeClr>
+              </a:solidFill>
+              <a:latin typeface="D2Coding" panose="020B0609020101020101" pitchFamily="49" charset="-127"/>
+              <a:ea typeface="D2Coding" panose="020B0609020101020101" pitchFamily="49" charset="-127"/>
+            </a:endParaRPr>
+          </a:p>
+          <a:p>
+            <a:r>
+              <a:rPr lang="ko-KR" altLang="en-US" sz="1400" dirty="0">
+                <a:solidFill>
+                  <a:schemeClr val="bg1">
+                    <a:lumMod val="75000"/>
+                  </a:schemeClr>
+                </a:solidFill>
+                <a:latin typeface="D2Coding" panose="020B0609020101020101" pitchFamily="49" charset="-127"/>
+                <a:ea typeface="D2Coding" panose="020B0609020101020101" pitchFamily="49" charset="-127"/>
+              </a:rPr>
+              <a:t>                                 </a:t>
+            </a:r>
+            <a:r>
+              <a:rPr lang="ko-KR" altLang="en-US" sz="1400" dirty="0" err="1">
+                <a:solidFill>
+                  <a:schemeClr val="bg1">
+                    <a:lumMod val="75000"/>
+                  </a:schemeClr>
+                </a:solidFill>
+                <a:latin typeface="D2Coding" panose="020B0609020101020101" pitchFamily="49" charset="-127"/>
+                <a:ea typeface="D2Coding" panose="020B0609020101020101" pitchFamily="49" charset="-127"/>
+              </a:rPr>
+              <a:t>Dload</a:t>
+            </a:r>
+            <a:r>
+              <a:rPr lang="ko-KR" altLang="en-US" sz="1400" dirty="0">
+                <a:solidFill>
+                  <a:schemeClr val="bg1">
+                    <a:lumMod val="75000"/>
+                  </a:schemeClr>
+                </a:solidFill>
+                <a:latin typeface="D2Coding" panose="020B0609020101020101" pitchFamily="49" charset="-127"/>
+                <a:ea typeface="D2Coding" panose="020B0609020101020101" pitchFamily="49" charset="-127"/>
+              </a:rPr>
+              <a:t>  </a:t>
+            </a:r>
+            <a:r>
+              <a:rPr lang="ko-KR" altLang="en-US" sz="1400" dirty="0" err="1">
+                <a:solidFill>
+                  <a:schemeClr val="bg1">
+                    <a:lumMod val="75000"/>
+                  </a:schemeClr>
+                </a:solidFill>
+                <a:latin typeface="D2Coding" panose="020B0609020101020101" pitchFamily="49" charset="-127"/>
+                <a:ea typeface="D2Coding" panose="020B0609020101020101" pitchFamily="49" charset="-127"/>
+              </a:rPr>
+              <a:t>Upload</a:t>
+            </a:r>
+            <a:r>
+              <a:rPr lang="ko-KR" altLang="en-US" sz="1400" dirty="0">
+                <a:solidFill>
+                  <a:schemeClr val="bg1">
+                    <a:lumMod val="75000"/>
+                  </a:schemeClr>
+                </a:solidFill>
+                <a:latin typeface="D2Coding" panose="020B0609020101020101" pitchFamily="49" charset="-127"/>
+                <a:ea typeface="D2Coding" panose="020B0609020101020101" pitchFamily="49" charset="-127"/>
+              </a:rPr>
+              <a:t>  </a:t>
+            </a:r>
+            <a:r>
+              <a:rPr lang="ko-KR" altLang="en-US" sz="1400" dirty="0" err="1">
+                <a:solidFill>
+                  <a:schemeClr val="bg1">
+                    <a:lumMod val="75000"/>
+                  </a:schemeClr>
+                </a:solidFill>
+                <a:latin typeface="D2Coding" panose="020B0609020101020101" pitchFamily="49" charset="-127"/>
+                <a:ea typeface="D2Coding" panose="020B0609020101020101" pitchFamily="49" charset="-127"/>
+              </a:rPr>
+              <a:t>Total</a:t>
+            </a:r>
+            <a:r>
+              <a:rPr lang="ko-KR" altLang="en-US" sz="1400" dirty="0">
+                <a:solidFill>
+                  <a:schemeClr val="bg1">
+                    <a:lumMod val="75000"/>
+                  </a:schemeClr>
+                </a:solidFill>
+                <a:latin typeface="D2Coding" panose="020B0609020101020101" pitchFamily="49" charset="-127"/>
+                <a:ea typeface="D2Coding" panose="020B0609020101020101" pitchFamily="49" charset="-127"/>
+              </a:rPr>
+              <a:t>   </a:t>
+            </a:r>
+            <a:r>
+              <a:rPr lang="ko-KR" altLang="en-US" sz="1400" dirty="0" err="1">
+                <a:solidFill>
+                  <a:schemeClr val="bg1">
+                    <a:lumMod val="75000"/>
+                  </a:schemeClr>
+                </a:solidFill>
+                <a:latin typeface="D2Coding" panose="020B0609020101020101" pitchFamily="49" charset="-127"/>
+                <a:ea typeface="D2Coding" panose="020B0609020101020101" pitchFamily="49" charset="-127"/>
+              </a:rPr>
+              <a:t>Spent</a:t>
+            </a:r>
+            <a:r>
+              <a:rPr lang="ko-KR" altLang="en-US" sz="1400" dirty="0">
+                <a:solidFill>
+                  <a:schemeClr val="bg1">
+                    <a:lumMod val="75000"/>
+                  </a:schemeClr>
+                </a:solidFill>
+                <a:latin typeface="D2Coding" panose="020B0609020101020101" pitchFamily="49" charset="-127"/>
+                <a:ea typeface="D2Coding" panose="020B0609020101020101" pitchFamily="49" charset="-127"/>
+              </a:rPr>
+              <a:t>   </a:t>
+            </a:r>
+            <a:r>
+              <a:rPr lang="ko-KR" altLang="en-US" sz="1400" dirty="0" err="1">
+                <a:solidFill>
+                  <a:schemeClr val="bg1">
+                    <a:lumMod val="75000"/>
+                  </a:schemeClr>
+                </a:solidFill>
+                <a:latin typeface="D2Coding" panose="020B0609020101020101" pitchFamily="49" charset="-127"/>
+                <a:ea typeface="D2Coding" panose="020B0609020101020101" pitchFamily="49" charset="-127"/>
+              </a:rPr>
+              <a:t>Left</a:t>
+            </a:r>
+            <a:r>
+              <a:rPr lang="ko-KR" altLang="en-US" sz="1400" dirty="0">
+                <a:solidFill>
+                  <a:schemeClr val="bg1">
+                    <a:lumMod val="75000"/>
+                  </a:schemeClr>
+                </a:solidFill>
+                <a:latin typeface="D2Coding" panose="020B0609020101020101" pitchFamily="49" charset="-127"/>
+                <a:ea typeface="D2Coding" panose="020B0609020101020101" pitchFamily="49" charset="-127"/>
+              </a:rPr>
+              <a:t>   </a:t>
+            </a:r>
+            <a:r>
+              <a:rPr lang="ko-KR" altLang="en-US" sz="1400" dirty="0" err="1">
+                <a:solidFill>
+                  <a:schemeClr val="bg1">
+                    <a:lumMod val="75000"/>
+                  </a:schemeClr>
+                </a:solidFill>
+                <a:latin typeface="D2Coding" panose="020B0609020101020101" pitchFamily="49" charset="-127"/>
+                <a:ea typeface="D2Coding" panose="020B0609020101020101" pitchFamily="49" charset="-127"/>
+              </a:rPr>
+              <a:t>Speed</a:t>
+            </a:r>
+            <a:endParaRPr lang="ko-KR" altLang="en-US" sz="1400" dirty="0">
+              <a:solidFill>
+                <a:schemeClr val="bg1">
+                  <a:lumMod val="75000"/>
+                </a:schemeClr>
+              </a:solidFill>
+              <a:latin typeface="D2Coding" panose="020B0609020101020101" pitchFamily="49" charset="-127"/>
+              <a:ea typeface="D2Coding" panose="020B0609020101020101" pitchFamily="49" charset="-127"/>
+            </a:endParaRPr>
+          </a:p>
+          <a:p>
+            <a:r>
+              <a:rPr lang="ko-KR" altLang="en-US" sz="1400" dirty="0">
+                <a:solidFill>
+                  <a:schemeClr val="bg1">
+                    <a:lumMod val="75000"/>
+                  </a:schemeClr>
+                </a:solidFill>
+                <a:latin typeface="D2Coding" panose="020B0609020101020101" pitchFamily="49" charset="-127"/>
+                <a:ea typeface="D2Coding" panose="020B0609020101020101" pitchFamily="49" charset="-127"/>
+              </a:rPr>
+              <a:t>100 90.76M 100 90.76M   0      0  9.39M      0   00:09   00:09         10.55M</a:t>
+            </a:r>
+            <a:endParaRPr lang="en-US" altLang="ko-KR" sz="1400" dirty="0">
+              <a:solidFill>
+                <a:schemeClr val="bg1">
+                  <a:lumMod val="75000"/>
+                </a:schemeClr>
+              </a:solidFill>
+              <a:latin typeface="D2Coding" panose="020B0609020101020101" pitchFamily="49" charset="-127"/>
+              <a:ea typeface="D2Coding" panose="020B0609020101020101" pitchFamily="49" charset="-127"/>
+            </a:endParaRPr>
+          </a:p>
+          <a:p>
+            <a:endParaRPr lang="en-US" altLang="ko-KR" sz="1400" dirty="0">
+              <a:solidFill>
+                <a:schemeClr val="bg1"/>
+              </a:solidFill>
+              <a:latin typeface="D2Coding" panose="020B0609020101020101" pitchFamily="49" charset="-127"/>
+              <a:ea typeface="D2Coding" panose="020B0609020101020101" pitchFamily="49" charset="-127"/>
+            </a:endParaRPr>
+          </a:p>
+          <a:p>
+            <a:r>
+              <a:rPr lang="en-US" altLang="ko-KR" sz="1400" dirty="0">
+                <a:solidFill>
+                  <a:schemeClr val="bg1"/>
+                </a:solidFill>
+                <a:latin typeface="D2Coding" panose="020B0609020101020101" pitchFamily="49" charset="-127"/>
+                <a:ea typeface="D2Coding" panose="020B0609020101020101" pitchFamily="49" charset="-127"/>
+              </a:rPr>
+              <a:t>D:\&gt;dir </a:t>
+            </a:r>
+            <a:r>
+              <a:rPr lang="en-US" altLang="ko-KR" sz="1400" dirty="0" err="1">
+                <a:solidFill>
+                  <a:schemeClr val="bg1"/>
+                </a:solidFill>
+                <a:latin typeface="D2Coding" panose="020B0609020101020101" pitchFamily="49" charset="-127"/>
+                <a:ea typeface="D2Coding" panose="020B0609020101020101" pitchFamily="49" charset="-127"/>
+              </a:rPr>
+              <a:t>camel.npy</a:t>
+            </a:r>
+            <a:endParaRPr lang="en-US" altLang="ko-KR" sz="1400" dirty="0">
+              <a:solidFill>
+                <a:schemeClr val="bg1"/>
+              </a:solidFill>
+              <a:latin typeface="D2Coding" panose="020B0609020101020101" pitchFamily="49" charset="-127"/>
+              <a:ea typeface="D2Coding" panose="020B0609020101020101" pitchFamily="49" charset="-127"/>
+            </a:endParaRPr>
+          </a:p>
+          <a:p>
+            <a:r>
+              <a:rPr lang="en-US" altLang="ko-KR" sz="1400" dirty="0">
+                <a:solidFill>
+                  <a:schemeClr val="bg1">
+                    <a:lumMod val="75000"/>
+                  </a:schemeClr>
+                </a:solidFill>
+                <a:latin typeface="D2Coding" panose="020B0609020101020101" pitchFamily="49" charset="-127"/>
+                <a:ea typeface="D2Coding" panose="020B0609020101020101" pitchFamily="49" charset="-127"/>
+              </a:rPr>
+              <a:t> D </a:t>
+            </a:r>
+            <a:r>
+              <a:rPr lang="ko-KR" altLang="en-US" sz="1400" dirty="0">
+                <a:solidFill>
+                  <a:schemeClr val="bg1">
+                    <a:lumMod val="75000"/>
+                  </a:schemeClr>
+                </a:solidFill>
+                <a:latin typeface="D2Coding" panose="020B0609020101020101" pitchFamily="49" charset="-127"/>
+                <a:ea typeface="D2Coding" panose="020B0609020101020101" pitchFamily="49" charset="-127"/>
+              </a:rPr>
+              <a:t>드라이브의 볼륨</a:t>
+            </a:r>
+            <a:r>
+              <a:rPr lang="en-US" altLang="ko-KR" sz="1400" dirty="0">
+                <a:solidFill>
+                  <a:schemeClr val="bg1">
+                    <a:lumMod val="75000"/>
+                  </a:schemeClr>
+                </a:solidFill>
+                <a:latin typeface="D2Coding" panose="020B0609020101020101" pitchFamily="49" charset="-127"/>
+                <a:ea typeface="D2Coding" panose="020B0609020101020101" pitchFamily="49" charset="-127"/>
+              </a:rPr>
+              <a:t>: DATA</a:t>
+            </a:r>
+          </a:p>
+          <a:p>
+            <a:r>
+              <a:rPr lang="en-US" altLang="ko-KR" sz="1400" dirty="0">
+                <a:solidFill>
+                  <a:schemeClr val="bg1">
+                    <a:lumMod val="75000"/>
+                  </a:schemeClr>
+                </a:solidFill>
+                <a:latin typeface="D2Coding" panose="020B0609020101020101" pitchFamily="49" charset="-127"/>
+                <a:ea typeface="D2Coding" panose="020B0609020101020101" pitchFamily="49" charset="-127"/>
+              </a:rPr>
+              <a:t> </a:t>
+            </a:r>
+            <a:r>
+              <a:rPr lang="ko-KR" altLang="en-US" sz="1400" dirty="0">
+                <a:solidFill>
+                  <a:schemeClr val="bg1">
+                    <a:lumMod val="75000"/>
+                  </a:schemeClr>
+                </a:solidFill>
+                <a:latin typeface="D2Coding" panose="020B0609020101020101" pitchFamily="49" charset="-127"/>
+                <a:ea typeface="D2Coding" panose="020B0609020101020101" pitchFamily="49" charset="-127"/>
+              </a:rPr>
+              <a:t>볼륨 일련 번호</a:t>
+            </a:r>
+            <a:r>
+              <a:rPr lang="en-US" altLang="ko-KR" sz="1400" dirty="0">
+                <a:solidFill>
+                  <a:schemeClr val="bg1">
+                    <a:lumMod val="75000"/>
+                  </a:schemeClr>
+                </a:solidFill>
+                <a:latin typeface="D2Coding" panose="020B0609020101020101" pitchFamily="49" charset="-127"/>
+                <a:ea typeface="D2Coding" panose="020B0609020101020101" pitchFamily="49" charset="-127"/>
+              </a:rPr>
+              <a:t>: BA26-5711</a:t>
+            </a:r>
+          </a:p>
+          <a:p>
+            <a:endParaRPr lang="en-US" altLang="ko-KR" sz="1400" dirty="0">
+              <a:solidFill>
+                <a:schemeClr val="bg1">
+                  <a:lumMod val="75000"/>
+                </a:schemeClr>
+              </a:solidFill>
+              <a:latin typeface="D2Coding" panose="020B0609020101020101" pitchFamily="49" charset="-127"/>
+              <a:ea typeface="D2Coding" panose="020B0609020101020101" pitchFamily="49" charset="-127"/>
+            </a:endParaRPr>
+          </a:p>
+          <a:p>
+            <a:r>
+              <a:rPr lang="en-US" altLang="ko-KR" sz="1400" dirty="0">
+                <a:solidFill>
+                  <a:schemeClr val="bg1">
+                    <a:lumMod val="75000"/>
+                  </a:schemeClr>
+                </a:solidFill>
+                <a:latin typeface="D2Coding" panose="020B0609020101020101" pitchFamily="49" charset="-127"/>
+                <a:ea typeface="D2Coding" panose="020B0609020101020101" pitchFamily="49" charset="-127"/>
+              </a:rPr>
+              <a:t> D:\ </a:t>
+            </a:r>
+            <a:r>
+              <a:rPr lang="ko-KR" altLang="en-US" sz="1400" dirty="0">
+                <a:solidFill>
+                  <a:schemeClr val="bg1">
+                    <a:lumMod val="75000"/>
+                  </a:schemeClr>
+                </a:solidFill>
+                <a:latin typeface="D2Coding" panose="020B0609020101020101" pitchFamily="49" charset="-127"/>
+                <a:ea typeface="D2Coding" panose="020B0609020101020101" pitchFamily="49" charset="-127"/>
+              </a:rPr>
+              <a:t>디렉터리</a:t>
+            </a:r>
+          </a:p>
+          <a:p>
+            <a:endParaRPr lang="ko-KR" altLang="en-US" sz="1400" dirty="0">
+              <a:solidFill>
+                <a:schemeClr val="bg1">
+                  <a:lumMod val="75000"/>
+                </a:schemeClr>
+              </a:solidFill>
+              <a:latin typeface="D2Coding" panose="020B0609020101020101" pitchFamily="49" charset="-127"/>
+              <a:ea typeface="D2Coding" panose="020B0609020101020101" pitchFamily="49" charset="-127"/>
+            </a:endParaRPr>
+          </a:p>
+          <a:p>
+            <a:r>
+              <a:rPr lang="en-US" altLang="ko-KR" sz="1400" dirty="0">
+                <a:solidFill>
+                  <a:schemeClr val="bg1">
+                    <a:lumMod val="75000"/>
+                  </a:schemeClr>
+                </a:solidFill>
+                <a:latin typeface="D2Coding" panose="020B0609020101020101" pitchFamily="49" charset="-127"/>
+                <a:ea typeface="D2Coding" panose="020B0609020101020101" pitchFamily="49" charset="-127"/>
+              </a:rPr>
+              <a:t>2026-09-07  </a:t>
+            </a:r>
+            <a:r>
+              <a:rPr lang="ko-KR" altLang="en-US" sz="1400" dirty="0">
+                <a:solidFill>
+                  <a:schemeClr val="bg1">
+                    <a:lumMod val="75000"/>
+                  </a:schemeClr>
+                </a:solidFill>
+                <a:latin typeface="D2Coding" panose="020B0609020101020101" pitchFamily="49" charset="-127"/>
+                <a:ea typeface="D2Coding" panose="020B0609020101020101" pitchFamily="49" charset="-127"/>
+              </a:rPr>
+              <a:t>오전 </a:t>
+            </a:r>
+            <a:r>
+              <a:rPr lang="en-US" altLang="ko-KR" sz="1400" dirty="0">
+                <a:solidFill>
+                  <a:schemeClr val="bg1">
+                    <a:lumMod val="75000"/>
+                  </a:schemeClr>
+                </a:solidFill>
+                <a:latin typeface="D2Coding" panose="020B0609020101020101" pitchFamily="49" charset="-127"/>
+                <a:ea typeface="D2Coding" panose="020B0609020101020101" pitchFamily="49" charset="-127"/>
+              </a:rPr>
+              <a:t>10:32        95,176,896 </a:t>
+            </a:r>
+            <a:r>
+              <a:rPr lang="en-US" altLang="ko-KR" sz="1400" dirty="0" err="1">
+                <a:solidFill>
+                  <a:schemeClr val="bg1">
+                    <a:lumMod val="75000"/>
+                  </a:schemeClr>
+                </a:solidFill>
+                <a:latin typeface="D2Coding" panose="020B0609020101020101" pitchFamily="49" charset="-127"/>
+                <a:ea typeface="D2Coding" panose="020B0609020101020101" pitchFamily="49" charset="-127"/>
+              </a:rPr>
+              <a:t>camel.npy</a:t>
+            </a:r>
+            <a:endParaRPr lang="en-US" altLang="ko-KR" sz="1400" dirty="0">
+              <a:solidFill>
+                <a:schemeClr val="bg1">
+                  <a:lumMod val="75000"/>
+                </a:schemeClr>
+              </a:solidFill>
+              <a:latin typeface="D2Coding" panose="020B0609020101020101" pitchFamily="49" charset="-127"/>
+              <a:ea typeface="D2Coding" panose="020B0609020101020101" pitchFamily="49" charset="-127"/>
+            </a:endParaRPr>
+          </a:p>
+          <a:p>
+            <a:r>
+              <a:rPr lang="en-US" altLang="ko-KR" sz="1400" dirty="0">
+                <a:solidFill>
+                  <a:schemeClr val="bg1">
+                    <a:lumMod val="75000"/>
+                  </a:schemeClr>
+                </a:solidFill>
+                <a:latin typeface="D2Coding" panose="020B0609020101020101" pitchFamily="49" charset="-127"/>
+                <a:ea typeface="D2Coding" panose="020B0609020101020101" pitchFamily="49" charset="-127"/>
+              </a:rPr>
+              <a:t>               1</a:t>
+            </a:r>
+            <a:r>
+              <a:rPr lang="ko-KR" altLang="en-US" sz="1400" dirty="0">
+                <a:solidFill>
+                  <a:schemeClr val="bg1">
+                    <a:lumMod val="75000"/>
+                  </a:schemeClr>
+                </a:solidFill>
+                <a:latin typeface="D2Coding" panose="020B0609020101020101" pitchFamily="49" charset="-127"/>
+                <a:ea typeface="D2Coding" panose="020B0609020101020101" pitchFamily="49" charset="-127"/>
+              </a:rPr>
+              <a:t>개 파일          </a:t>
+            </a:r>
+            <a:r>
+              <a:rPr lang="en-US" altLang="ko-KR" sz="1400" dirty="0">
+                <a:solidFill>
+                  <a:schemeClr val="bg1">
+                    <a:lumMod val="75000"/>
+                  </a:schemeClr>
+                </a:solidFill>
+                <a:latin typeface="D2Coding" panose="020B0609020101020101" pitchFamily="49" charset="-127"/>
+                <a:ea typeface="D2Coding" panose="020B0609020101020101" pitchFamily="49" charset="-127"/>
+              </a:rPr>
+              <a:t>95,176,896 </a:t>
+            </a:r>
+            <a:r>
+              <a:rPr lang="ko-KR" altLang="en-US" sz="1400" dirty="0">
+                <a:solidFill>
+                  <a:schemeClr val="bg1">
+                    <a:lumMod val="75000"/>
+                  </a:schemeClr>
+                </a:solidFill>
+                <a:latin typeface="D2Coding" panose="020B0609020101020101" pitchFamily="49" charset="-127"/>
+                <a:ea typeface="D2Coding" panose="020B0609020101020101" pitchFamily="49" charset="-127"/>
+              </a:rPr>
+              <a:t>바이트</a:t>
+            </a:r>
+          </a:p>
+          <a:p>
+            <a:r>
+              <a:rPr lang="ko-KR" altLang="en-US" sz="1400" dirty="0">
+                <a:solidFill>
+                  <a:schemeClr val="bg1">
+                    <a:lumMod val="75000"/>
+                  </a:schemeClr>
+                </a:solidFill>
+                <a:latin typeface="D2Coding" panose="020B0609020101020101" pitchFamily="49" charset="-127"/>
+                <a:ea typeface="D2Coding" panose="020B0609020101020101" pitchFamily="49" charset="-127"/>
+              </a:rPr>
+              <a:t>               </a:t>
+            </a:r>
+            <a:r>
+              <a:rPr lang="en-US" altLang="ko-KR" sz="1400" dirty="0">
+                <a:solidFill>
+                  <a:schemeClr val="bg1">
+                    <a:lumMod val="75000"/>
+                  </a:schemeClr>
+                </a:solidFill>
+                <a:latin typeface="D2Coding" panose="020B0609020101020101" pitchFamily="49" charset="-127"/>
+                <a:ea typeface="D2Coding" panose="020B0609020101020101" pitchFamily="49" charset="-127"/>
+              </a:rPr>
+              <a:t>0</a:t>
+            </a:r>
+            <a:r>
+              <a:rPr lang="ko-KR" altLang="en-US" sz="1400" dirty="0">
+                <a:solidFill>
+                  <a:schemeClr val="bg1">
+                    <a:lumMod val="75000"/>
+                  </a:schemeClr>
+                </a:solidFill>
+                <a:latin typeface="D2Coding" panose="020B0609020101020101" pitchFamily="49" charset="-127"/>
+                <a:ea typeface="D2Coding" panose="020B0609020101020101" pitchFamily="49" charset="-127"/>
+              </a:rPr>
+              <a:t>개 디렉터리  </a:t>
+            </a:r>
+            <a:r>
+              <a:rPr lang="en-US" altLang="ko-KR" sz="1400" dirty="0">
+                <a:solidFill>
+                  <a:schemeClr val="bg1">
+                    <a:lumMod val="75000"/>
+                  </a:schemeClr>
+                </a:solidFill>
+                <a:latin typeface="D2Coding" panose="020B0609020101020101" pitchFamily="49" charset="-127"/>
+                <a:ea typeface="D2Coding" panose="020B0609020101020101" pitchFamily="49" charset="-127"/>
+              </a:rPr>
+              <a:t>486,531,141,632 </a:t>
+            </a:r>
+            <a:r>
+              <a:rPr lang="ko-KR" altLang="en-US" sz="1400" dirty="0">
+                <a:solidFill>
+                  <a:schemeClr val="bg1">
+                    <a:lumMod val="75000"/>
+                  </a:schemeClr>
+                </a:solidFill>
+                <a:latin typeface="D2Coding" panose="020B0609020101020101" pitchFamily="49" charset="-127"/>
+                <a:ea typeface="D2Coding" panose="020B0609020101020101" pitchFamily="49" charset="-127"/>
+              </a:rPr>
+              <a:t>바이트 남음</a:t>
+            </a:r>
+          </a:p>
+        </p:txBody>
+      </p:sp>
+    </p:spTree>
+    <p:extLst>
+      <p:ext uri="{BB962C8B-B14F-4D97-AF65-F5344CB8AC3E}">
+        <p14:creationId xmlns:p14="http://schemas.microsoft.com/office/powerpoint/2010/main" val="2273430292"/>
+      </p:ext>
+    </p:extLst>
+  </p:cSld>
+  <p:clrMapOvr>
+    <a:masterClrMapping/>
+  </p:clrMapOvr>
+</p:sld>
+</file>
+
+<file path=ppt/slides/slide5.xml><?xml version="1.0" encoding="utf-8"?>
+<p:sld xmlns:a="http://schemas.openxmlformats.org/drawingml/2006/main" xmlns:r="http://schemas.openxmlformats.org/officeDocument/2006/relationships" xmlns:p="http://schemas.openxmlformats.org/presentationml/2006/main">
+  <p:cSld>
+    <p:spTree>
+      <p:nvGrpSpPr>
+        <p:cNvPr id="1" name="">
+          <a:extLst>
+            <a:ext uri="{FF2B5EF4-FFF2-40B4-BE49-F238E27FC236}">
+              <a16:creationId xmlns:a16="http://schemas.microsoft.com/office/drawing/2014/main" id="{590CE07B-FCBA-1B29-8A7D-3CD8E429C132}"/>
+            </a:ext>
+          </a:extLst>
+        </p:cNvPr>
+        <p:cNvGrpSpPr/>
+        <p:nvPr/>
+      </p:nvGrpSpPr>
+      <p:grpSpPr>
+        <a:xfrm>
+          <a:off x="0" y="0"/>
+          <a:ext cx="0" cy="0"/>
+          <a:chOff x="0" y="0"/>
+          <a:chExt cx="0" cy="0"/>
+        </a:xfrm>
+      </p:grpSpPr>
+      <p:sp>
+        <p:nvSpPr>
+          <p:cNvPr id="3" name="제목 1">
+            <a:extLst>
+              <a:ext uri="{FF2B5EF4-FFF2-40B4-BE49-F238E27FC236}">
+                <a16:creationId xmlns:a16="http://schemas.microsoft.com/office/drawing/2014/main" id="{BD178554-0A1B-DA60-12EC-2F50889F177F}"/>
+              </a:ext>
+            </a:extLst>
+          </p:cNvPr>
+          <p:cNvSpPr txBox="1">
+            <a:spLocks/>
+          </p:cNvSpPr>
+          <p:nvPr/>
+        </p:nvSpPr>
+        <p:spPr>
+          <a:xfrm>
+            <a:off x="475645" y="481983"/>
+            <a:ext cx="10353762" cy="766439"/>
+          </a:xfrm>
+          <a:prstGeom prst="rect">
+            <a:avLst/>
+          </a:prstGeom>
+        </p:spPr>
+        <p:txBody>
+          <a:bodyPr vert="horz" lIns="91440" tIns="45720" rIns="91440" bIns="45720" rtlCol="0" anchor="ctr">
+            <a:normAutofit/>
+          </a:bodyPr>
+          <a:lstStyle>
+            <a:lvl1pPr algn="ctr" defTabSz="914400" rtl="0" eaLnBrk="1" latinLnBrk="1" hangingPunct="1">
+              <a:lnSpc>
+                <a:spcPct val="90000"/>
+              </a:lnSpc>
+              <a:spcBef>
+                <a:spcPct val="0"/>
+              </a:spcBef>
+              <a:buNone/>
+              <a:defRPr sz="3200" kern="1200" cap="all" baseline="0">
+                <a:solidFill>
+                  <a:schemeClr val="tx1"/>
+                </a:solidFill>
+                <a:effectLst/>
+                <a:latin typeface="Batang" panose="02030600000101010101" pitchFamily="18" charset="-127"/>
+                <a:ea typeface="Batang" panose="02030600000101010101" pitchFamily="18" charset="-127"/>
+                <a:cs typeface="+mj-cs"/>
+              </a:defRPr>
+            </a:lvl1pPr>
+          </a:lstStyle>
+          <a:p>
+            <a:pPr algn="l"/>
+            <a:r>
+              <a:rPr lang="en-US" altLang="ko-KR" sz="2800" cap="none" dirty="0">
+                <a:solidFill>
+                  <a:schemeClr val="bg2">
+                    <a:lumMod val="25000"/>
+                  </a:schemeClr>
+                </a:solidFill>
+                <a:latin typeface="D2Coding" panose="020B0609020101020101" pitchFamily="49" charset="-127"/>
+                <a:ea typeface="D2Coding" panose="020B0609020101020101" pitchFamily="49" charset="-127"/>
+                <a:cs typeface="Segoe UI Light" panose="020B0502040204020203" pitchFamily="34" charset="0"/>
+              </a:rPr>
+              <a:t>Data</a:t>
+            </a:r>
+            <a:r>
+              <a:rPr lang="ko-KR" altLang="en-US" sz="2800" cap="none" dirty="0">
+                <a:solidFill>
+                  <a:schemeClr val="bg2">
+                    <a:lumMod val="25000"/>
+                  </a:schemeClr>
+                </a:solidFill>
+                <a:latin typeface="D2Coding" panose="020B0609020101020101" pitchFamily="49" charset="-127"/>
+                <a:ea typeface="D2Coding" panose="020B0609020101020101" pitchFamily="49" charset="-127"/>
+                <a:cs typeface="Segoe UI Light" panose="020B0502040204020203" pitchFamily="34" charset="0"/>
+              </a:rPr>
+              <a:t> </a:t>
+            </a:r>
+            <a:r>
+              <a:rPr lang="en-US" altLang="ko-KR" sz="2800" cap="none" dirty="0">
+                <a:solidFill>
+                  <a:schemeClr val="bg2">
+                    <a:lumMod val="25000"/>
+                  </a:schemeClr>
+                </a:solidFill>
+                <a:latin typeface="D2Coding" panose="020B0609020101020101" pitchFamily="49" charset="-127"/>
+                <a:ea typeface="D2Coding" panose="020B0609020101020101" pitchFamily="49" charset="-127"/>
+                <a:cs typeface="Segoe UI Light" panose="020B0502040204020203" pitchFamily="34" charset="0"/>
+              </a:rPr>
+              <a:t>for your first GAN</a:t>
+            </a:r>
+            <a:endParaRPr lang="ko-KR" altLang="en-US" sz="2800" cap="none" dirty="0">
+              <a:solidFill>
+                <a:schemeClr val="bg2">
+                  <a:lumMod val="25000"/>
+                </a:schemeClr>
+              </a:solidFill>
+              <a:latin typeface="D2Coding" panose="020B0609020101020101" pitchFamily="49" charset="-127"/>
+              <a:ea typeface="D2Coding" panose="020B0609020101020101" pitchFamily="49" charset="-127"/>
+              <a:cs typeface="Segoe UI Light" panose="020B0502040204020203" pitchFamily="34" charset="0"/>
+            </a:endParaRPr>
+          </a:p>
+        </p:txBody>
+      </p:sp>
+      <p:pic>
+        <p:nvPicPr>
+          <p:cNvPr id="2" name="그림 1">
+            <a:extLst>
+              <a:ext uri="{FF2B5EF4-FFF2-40B4-BE49-F238E27FC236}">
+                <a16:creationId xmlns:a16="http://schemas.microsoft.com/office/drawing/2014/main" id="{0CCC53DC-E585-76F4-3FC1-1D370048CD74}"/>
+              </a:ext>
+            </a:extLst>
+          </p:cNvPr>
+          <p:cNvPicPr>
+            <a:picLocks noChangeAspect="1"/>
+          </p:cNvPicPr>
+          <p:nvPr/>
+        </p:nvPicPr>
+        <p:blipFill>
+          <a:blip r:embed="rId2"/>
+          <a:stretch>
+            <a:fillRect/>
+          </a:stretch>
+        </p:blipFill>
+        <p:spPr>
+          <a:xfrm>
+            <a:off x="7546109" y="1400503"/>
+            <a:ext cx="2615598" cy="5146964"/>
+          </a:xfrm>
+          <a:prstGeom prst="rect">
+            <a:avLst/>
+          </a:prstGeom>
+        </p:spPr>
+      </p:pic>
+      <p:sp>
+        <p:nvSpPr>
+          <p:cNvPr id="6" name="TextBox 5">
+            <a:extLst>
+              <a:ext uri="{FF2B5EF4-FFF2-40B4-BE49-F238E27FC236}">
+                <a16:creationId xmlns:a16="http://schemas.microsoft.com/office/drawing/2014/main" id="{F45AAF6F-2D7B-2A49-20E4-E4FAA7A2D666}"/>
+              </a:ext>
+            </a:extLst>
+          </p:cNvPr>
+          <p:cNvSpPr txBox="1"/>
+          <p:nvPr/>
+        </p:nvSpPr>
+        <p:spPr>
+          <a:xfrm>
+            <a:off x="591127" y="1539049"/>
+            <a:ext cx="6585528" cy="4524315"/>
+          </a:xfrm>
+          <a:prstGeom prst="rect">
+            <a:avLst/>
+          </a:prstGeom>
+          <a:solidFill>
+            <a:srgbClr val="76E3FF"/>
+          </a:solidFill>
+        </p:spPr>
+        <p:txBody>
+          <a:bodyPr wrap="square">
+            <a:spAutoFit/>
+          </a:bodyPr>
+          <a:lstStyle/>
+          <a:p>
+            <a:pPr>
+              <a:lnSpc>
+                <a:spcPct val="100000"/>
+              </a:lnSpc>
+              <a:buNone/>
+            </a:pPr>
+            <a:r>
+              <a:rPr lang="ko-KR" altLang="ko-KR" sz="1200" b="0" dirty="0">
+                <a:solidFill>
+                  <a:schemeClr val="tx1"/>
+                </a:solidFill>
+                <a:effectLst/>
+                <a:latin typeface="D2Coding" panose="020B0609020101020101" pitchFamily="49" charset="-127"/>
+                <a:ea typeface="D2Coding" panose="020B0609020101020101" pitchFamily="49" charset="-127"/>
+              </a:rPr>
+              <a:t># 1. </a:t>
+            </a:r>
+            <a:r>
+              <a:rPr lang="ko-KR" altLang="ko-KR" sz="1200" b="0" dirty="0" err="1">
+                <a:solidFill>
+                  <a:schemeClr val="tx1"/>
+                </a:solidFill>
+                <a:effectLst/>
+                <a:latin typeface="D2Coding" panose="020B0609020101020101" pitchFamily="49" charset="-127"/>
+                <a:ea typeface="D2Coding" panose="020B0609020101020101" pitchFamily="49" charset="-127"/>
+              </a:rPr>
+              <a:t>Colab</a:t>
+            </a:r>
+            <a:r>
+              <a:rPr lang="ko-KR" altLang="ko-KR" sz="1200" b="0" dirty="0">
+                <a:solidFill>
+                  <a:schemeClr val="tx1"/>
+                </a:solidFill>
+                <a:effectLst/>
+                <a:latin typeface="D2Coding" panose="020B0609020101020101" pitchFamily="49" charset="-127"/>
+                <a:ea typeface="D2Coding" panose="020B0609020101020101" pitchFamily="49" charset="-127"/>
+              </a:rPr>
+              <a:t> 환경으로 </a:t>
+            </a:r>
+            <a:r>
+              <a:rPr lang="ko-KR" altLang="ko-KR" sz="1200" b="0" dirty="0" err="1">
+                <a:solidFill>
+                  <a:schemeClr val="tx1"/>
+                </a:solidFill>
+                <a:effectLst/>
+                <a:latin typeface="D2Coding" panose="020B0609020101020101" pitchFamily="49" charset="-127"/>
+                <a:ea typeface="D2Coding" panose="020B0609020101020101" pitchFamily="49" charset="-127"/>
+              </a:rPr>
+              <a:t>camel.npy</a:t>
+            </a:r>
+            <a:r>
+              <a:rPr lang="ko-KR" altLang="ko-KR" sz="1200" b="0" dirty="0">
+                <a:solidFill>
+                  <a:schemeClr val="tx1"/>
+                </a:solidFill>
+                <a:effectLst/>
+                <a:latin typeface="D2Coding" panose="020B0609020101020101" pitchFamily="49" charset="-127"/>
+                <a:ea typeface="D2Coding" panose="020B0609020101020101" pitchFamily="49" charset="-127"/>
+              </a:rPr>
+              <a:t> 데이터셋 직접 다운로드</a:t>
+            </a:r>
+          </a:p>
+          <a:p>
+            <a:pPr>
+              <a:lnSpc>
+                <a:spcPct val="100000"/>
+              </a:lnSpc>
+              <a:buNone/>
+            </a:pPr>
+            <a:r>
+              <a:rPr lang="ko-KR" altLang="ko-KR" sz="1200" b="0" dirty="0">
+                <a:solidFill>
+                  <a:schemeClr val="tx1"/>
+                </a:solidFill>
+                <a:effectLst/>
+                <a:latin typeface="D2Coding" panose="020B0609020101020101" pitchFamily="49" charset="-127"/>
+                <a:ea typeface="D2Coding" panose="020B0609020101020101" pitchFamily="49" charset="-127"/>
+              </a:rPr>
+              <a:t>!</a:t>
+            </a:r>
+            <a:r>
+              <a:rPr lang="ko-KR" altLang="ko-KR" sz="1200" b="0" dirty="0" err="1">
+                <a:solidFill>
+                  <a:schemeClr val="tx1"/>
+                </a:solidFill>
+                <a:effectLst/>
+                <a:latin typeface="D2Coding" panose="020B0609020101020101" pitchFamily="49" charset="-127"/>
+                <a:ea typeface="D2Coding" panose="020B0609020101020101" pitchFamily="49" charset="-127"/>
+              </a:rPr>
+              <a:t>wget</a:t>
+            </a:r>
+            <a:r>
+              <a:rPr lang="ko-KR" altLang="ko-KR" sz="1200" b="0" dirty="0">
+                <a:solidFill>
+                  <a:schemeClr val="tx1"/>
+                </a:solidFill>
+                <a:effectLst/>
+                <a:latin typeface="D2Coding" panose="020B0609020101020101" pitchFamily="49" charset="-127"/>
+                <a:ea typeface="D2Coding" panose="020B0609020101020101" pitchFamily="49" charset="-127"/>
+              </a:rPr>
+              <a:t> https://storage.googleapis.com/quickdraw_dataset/full/numpy_bitmap/camel.npy</a:t>
+            </a:r>
+          </a:p>
+          <a:p>
+            <a:pPr>
+              <a:lnSpc>
+                <a:spcPct val="100000"/>
+              </a:lnSpc>
+              <a:buNone/>
+            </a:pPr>
+            <a:endParaRPr lang="ko-KR" altLang="ko-KR" sz="1200" b="0" dirty="0">
+              <a:solidFill>
+                <a:schemeClr val="tx1"/>
+              </a:solidFill>
+              <a:effectLst/>
+              <a:latin typeface="D2Coding" panose="020B0609020101020101" pitchFamily="49" charset="-127"/>
+              <a:ea typeface="D2Coding" panose="020B0609020101020101" pitchFamily="49" charset="-127"/>
+            </a:endParaRPr>
+          </a:p>
+          <a:p>
+            <a:pPr>
+              <a:lnSpc>
+                <a:spcPct val="100000"/>
+              </a:lnSpc>
+              <a:buNone/>
+            </a:pPr>
+            <a:r>
+              <a:rPr lang="ko-KR" altLang="ko-KR" sz="1200" b="0" dirty="0" err="1">
+                <a:solidFill>
+                  <a:schemeClr val="tx1"/>
+                </a:solidFill>
+                <a:effectLst/>
+                <a:latin typeface="D2Coding" panose="020B0609020101020101" pitchFamily="49" charset="-127"/>
+                <a:ea typeface="D2Coding" panose="020B0609020101020101" pitchFamily="49" charset="-127"/>
+              </a:rPr>
+              <a:t>import</a:t>
+            </a:r>
+            <a:r>
+              <a:rPr lang="ko-KR" altLang="ko-KR" sz="1200" b="0" dirty="0">
+                <a:solidFill>
+                  <a:schemeClr val="tx1"/>
+                </a:solidFill>
+                <a:effectLst/>
+                <a:latin typeface="D2Coding" panose="020B0609020101020101" pitchFamily="49" charset="-127"/>
+                <a:ea typeface="D2Coding" panose="020B0609020101020101" pitchFamily="49" charset="-127"/>
+              </a:rPr>
+              <a:t> </a:t>
+            </a:r>
+            <a:r>
+              <a:rPr lang="ko-KR" altLang="ko-KR" sz="1200" b="0" dirty="0" err="1">
+                <a:solidFill>
+                  <a:schemeClr val="tx1"/>
+                </a:solidFill>
+                <a:effectLst/>
+                <a:latin typeface="D2Coding" panose="020B0609020101020101" pitchFamily="49" charset="-127"/>
+                <a:ea typeface="D2Coding" panose="020B0609020101020101" pitchFamily="49" charset="-127"/>
+              </a:rPr>
+              <a:t>numpy</a:t>
+            </a:r>
+            <a:r>
+              <a:rPr lang="ko-KR" altLang="ko-KR" sz="1200" b="0" dirty="0">
+                <a:solidFill>
+                  <a:schemeClr val="tx1"/>
+                </a:solidFill>
+                <a:effectLst/>
+                <a:latin typeface="D2Coding" panose="020B0609020101020101" pitchFamily="49" charset="-127"/>
+                <a:ea typeface="D2Coding" panose="020B0609020101020101" pitchFamily="49" charset="-127"/>
+              </a:rPr>
+              <a:t> </a:t>
+            </a:r>
+            <a:r>
+              <a:rPr lang="ko-KR" altLang="ko-KR" sz="1200" b="0" dirty="0" err="1">
+                <a:solidFill>
+                  <a:schemeClr val="tx1"/>
+                </a:solidFill>
+                <a:effectLst/>
+                <a:latin typeface="D2Coding" panose="020B0609020101020101" pitchFamily="49" charset="-127"/>
+                <a:ea typeface="D2Coding" panose="020B0609020101020101" pitchFamily="49" charset="-127"/>
+              </a:rPr>
+              <a:t>as</a:t>
+            </a:r>
+            <a:r>
+              <a:rPr lang="ko-KR" altLang="ko-KR" sz="1200" b="0" dirty="0">
+                <a:solidFill>
+                  <a:schemeClr val="tx1"/>
+                </a:solidFill>
+                <a:effectLst/>
+                <a:latin typeface="D2Coding" panose="020B0609020101020101" pitchFamily="49" charset="-127"/>
+                <a:ea typeface="D2Coding" panose="020B0609020101020101" pitchFamily="49" charset="-127"/>
+              </a:rPr>
+              <a:t> </a:t>
+            </a:r>
+            <a:r>
+              <a:rPr lang="ko-KR" altLang="ko-KR" sz="1200" b="0" dirty="0" err="1">
+                <a:solidFill>
+                  <a:schemeClr val="tx1"/>
+                </a:solidFill>
+                <a:effectLst/>
+                <a:latin typeface="D2Coding" panose="020B0609020101020101" pitchFamily="49" charset="-127"/>
+                <a:ea typeface="D2Coding" panose="020B0609020101020101" pitchFamily="49" charset="-127"/>
+              </a:rPr>
+              <a:t>np</a:t>
+            </a:r>
+            <a:endParaRPr lang="ko-KR" altLang="ko-KR" sz="1200" b="0" dirty="0">
+              <a:solidFill>
+                <a:schemeClr val="tx1"/>
+              </a:solidFill>
+              <a:effectLst/>
+              <a:latin typeface="D2Coding" panose="020B0609020101020101" pitchFamily="49" charset="-127"/>
+              <a:ea typeface="D2Coding" panose="020B0609020101020101" pitchFamily="49" charset="-127"/>
+            </a:endParaRPr>
+          </a:p>
+          <a:p>
+            <a:pPr>
+              <a:lnSpc>
+                <a:spcPct val="100000"/>
+              </a:lnSpc>
+              <a:buNone/>
+            </a:pPr>
+            <a:r>
+              <a:rPr lang="ko-KR" altLang="ko-KR" sz="1200" b="0" dirty="0" err="1">
+                <a:solidFill>
+                  <a:schemeClr val="tx1"/>
+                </a:solidFill>
+                <a:effectLst/>
+                <a:latin typeface="D2Coding" panose="020B0609020101020101" pitchFamily="49" charset="-127"/>
+                <a:ea typeface="D2Coding" panose="020B0609020101020101" pitchFamily="49" charset="-127"/>
+              </a:rPr>
+              <a:t>import</a:t>
+            </a:r>
+            <a:r>
+              <a:rPr lang="ko-KR" altLang="ko-KR" sz="1200" b="0" dirty="0">
+                <a:solidFill>
+                  <a:schemeClr val="tx1"/>
+                </a:solidFill>
+                <a:effectLst/>
+                <a:latin typeface="D2Coding" panose="020B0609020101020101" pitchFamily="49" charset="-127"/>
+                <a:ea typeface="D2Coding" panose="020B0609020101020101" pitchFamily="49" charset="-127"/>
+              </a:rPr>
+              <a:t> </a:t>
+            </a:r>
+            <a:r>
+              <a:rPr lang="ko-KR" altLang="ko-KR" sz="1200" b="0" dirty="0" err="1">
+                <a:solidFill>
+                  <a:schemeClr val="tx1"/>
+                </a:solidFill>
+                <a:effectLst/>
+                <a:latin typeface="D2Coding" panose="020B0609020101020101" pitchFamily="49" charset="-127"/>
+                <a:ea typeface="D2Coding" panose="020B0609020101020101" pitchFamily="49" charset="-127"/>
+              </a:rPr>
+              <a:t>matplotlib.pyplot</a:t>
+            </a:r>
+            <a:r>
+              <a:rPr lang="ko-KR" altLang="ko-KR" sz="1200" b="0" dirty="0">
+                <a:solidFill>
+                  <a:schemeClr val="tx1"/>
+                </a:solidFill>
+                <a:effectLst/>
+                <a:latin typeface="D2Coding" panose="020B0609020101020101" pitchFamily="49" charset="-127"/>
+                <a:ea typeface="D2Coding" panose="020B0609020101020101" pitchFamily="49" charset="-127"/>
+              </a:rPr>
+              <a:t> </a:t>
+            </a:r>
+            <a:r>
+              <a:rPr lang="ko-KR" altLang="ko-KR" sz="1200" b="0" dirty="0" err="1">
+                <a:solidFill>
+                  <a:schemeClr val="tx1"/>
+                </a:solidFill>
+                <a:effectLst/>
+                <a:latin typeface="D2Coding" panose="020B0609020101020101" pitchFamily="49" charset="-127"/>
+                <a:ea typeface="D2Coding" panose="020B0609020101020101" pitchFamily="49" charset="-127"/>
+              </a:rPr>
+              <a:t>as</a:t>
+            </a:r>
+            <a:r>
+              <a:rPr lang="ko-KR" altLang="ko-KR" sz="1200" b="0" dirty="0">
+                <a:solidFill>
+                  <a:schemeClr val="tx1"/>
+                </a:solidFill>
+                <a:effectLst/>
+                <a:latin typeface="D2Coding" panose="020B0609020101020101" pitchFamily="49" charset="-127"/>
+                <a:ea typeface="D2Coding" panose="020B0609020101020101" pitchFamily="49" charset="-127"/>
+              </a:rPr>
+              <a:t> </a:t>
+            </a:r>
+            <a:r>
+              <a:rPr lang="ko-KR" altLang="ko-KR" sz="1200" b="0" dirty="0" err="1">
+                <a:solidFill>
+                  <a:schemeClr val="tx1"/>
+                </a:solidFill>
+                <a:effectLst/>
+                <a:latin typeface="D2Coding" panose="020B0609020101020101" pitchFamily="49" charset="-127"/>
+                <a:ea typeface="D2Coding" panose="020B0609020101020101" pitchFamily="49" charset="-127"/>
+              </a:rPr>
+              <a:t>plt</a:t>
+            </a:r>
+            <a:endParaRPr lang="ko-KR" altLang="ko-KR" sz="1200" b="0" dirty="0">
+              <a:solidFill>
+                <a:schemeClr val="tx1"/>
+              </a:solidFill>
+              <a:effectLst/>
+              <a:latin typeface="D2Coding" panose="020B0609020101020101" pitchFamily="49" charset="-127"/>
+              <a:ea typeface="D2Coding" panose="020B0609020101020101" pitchFamily="49" charset="-127"/>
+            </a:endParaRPr>
+          </a:p>
+          <a:p>
+            <a:pPr>
+              <a:lnSpc>
+                <a:spcPct val="100000"/>
+              </a:lnSpc>
+              <a:buNone/>
+            </a:pPr>
+            <a:endParaRPr lang="ko-KR" altLang="ko-KR" sz="1200" b="0" dirty="0">
+              <a:solidFill>
+                <a:schemeClr val="tx1"/>
+              </a:solidFill>
+              <a:effectLst/>
+              <a:latin typeface="D2Coding" panose="020B0609020101020101" pitchFamily="49" charset="-127"/>
+              <a:ea typeface="D2Coding" panose="020B0609020101020101" pitchFamily="49" charset="-127"/>
+            </a:endParaRPr>
+          </a:p>
+          <a:p>
+            <a:pPr>
+              <a:lnSpc>
+                <a:spcPct val="100000"/>
+              </a:lnSpc>
+              <a:buNone/>
+            </a:pPr>
+            <a:r>
+              <a:rPr lang="ko-KR" altLang="ko-KR" sz="1200" b="0" dirty="0">
+                <a:solidFill>
+                  <a:schemeClr val="tx1"/>
+                </a:solidFill>
+                <a:effectLst/>
+                <a:latin typeface="D2Coding" panose="020B0609020101020101" pitchFamily="49" charset="-127"/>
+                <a:ea typeface="D2Coding" panose="020B0609020101020101" pitchFamily="49" charset="-127"/>
+              </a:rPr>
+              <a:t># 2. .</a:t>
+            </a:r>
+            <a:r>
+              <a:rPr lang="ko-KR" altLang="ko-KR" sz="1200" b="0" dirty="0" err="1">
+                <a:solidFill>
+                  <a:schemeClr val="tx1"/>
+                </a:solidFill>
+                <a:effectLst/>
+                <a:latin typeface="D2Coding" panose="020B0609020101020101" pitchFamily="49" charset="-127"/>
+                <a:ea typeface="D2Coding" panose="020B0609020101020101" pitchFamily="49" charset="-127"/>
+              </a:rPr>
+              <a:t>npy</a:t>
+            </a:r>
+            <a:r>
+              <a:rPr lang="ko-KR" altLang="ko-KR" sz="1200" b="0" dirty="0">
+                <a:solidFill>
+                  <a:schemeClr val="tx1"/>
+                </a:solidFill>
+                <a:effectLst/>
+                <a:latin typeface="D2Coding" panose="020B0609020101020101" pitchFamily="49" charset="-127"/>
+                <a:ea typeface="D2Coding" panose="020B0609020101020101" pitchFamily="49" charset="-127"/>
+              </a:rPr>
+              <a:t> 파일 불러오기</a:t>
+            </a:r>
+          </a:p>
+          <a:p>
+            <a:pPr>
+              <a:lnSpc>
+                <a:spcPct val="100000"/>
+              </a:lnSpc>
+              <a:buNone/>
+            </a:pPr>
+            <a:r>
+              <a:rPr lang="ko-KR" altLang="ko-KR" sz="1200" b="0" dirty="0" err="1">
+                <a:solidFill>
+                  <a:schemeClr val="tx1"/>
+                </a:solidFill>
+                <a:effectLst/>
+                <a:latin typeface="D2Coding" panose="020B0609020101020101" pitchFamily="49" charset="-127"/>
+                <a:ea typeface="D2Coding" panose="020B0609020101020101" pitchFamily="49" charset="-127"/>
+              </a:rPr>
+              <a:t>camels</a:t>
+            </a:r>
+            <a:r>
+              <a:rPr lang="ko-KR" altLang="ko-KR" sz="1200" b="0" dirty="0">
+                <a:solidFill>
+                  <a:schemeClr val="tx1"/>
+                </a:solidFill>
+                <a:effectLst/>
+                <a:latin typeface="D2Coding" panose="020B0609020101020101" pitchFamily="49" charset="-127"/>
+                <a:ea typeface="D2Coding" panose="020B0609020101020101" pitchFamily="49" charset="-127"/>
+              </a:rPr>
+              <a:t> = </a:t>
+            </a:r>
+            <a:r>
+              <a:rPr lang="ko-KR" altLang="ko-KR" sz="1200" b="0" dirty="0" err="1">
+                <a:solidFill>
+                  <a:schemeClr val="tx1"/>
+                </a:solidFill>
+                <a:effectLst/>
+                <a:latin typeface="D2Coding" panose="020B0609020101020101" pitchFamily="49" charset="-127"/>
+                <a:ea typeface="D2Coding" panose="020B0609020101020101" pitchFamily="49" charset="-127"/>
+              </a:rPr>
+              <a:t>np.load</a:t>
+            </a:r>
+            <a:r>
+              <a:rPr lang="ko-KR" altLang="ko-KR" sz="1200" b="0" dirty="0">
+                <a:solidFill>
+                  <a:schemeClr val="tx1"/>
+                </a:solidFill>
+                <a:effectLst/>
+                <a:latin typeface="D2Coding" panose="020B0609020101020101" pitchFamily="49" charset="-127"/>
+                <a:ea typeface="D2Coding" panose="020B0609020101020101" pitchFamily="49" charset="-127"/>
+              </a:rPr>
+              <a:t>('</a:t>
+            </a:r>
+            <a:r>
+              <a:rPr lang="ko-KR" altLang="ko-KR" sz="1200" b="0" dirty="0" err="1">
+                <a:solidFill>
+                  <a:schemeClr val="tx1"/>
+                </a:solidFill>
+                <a:effectLst/>
+                <a:latin typeface="D2Coding" panose="020B0609020101020101" pitchFamily="49" charset="-127"/>
+                <a:ea typeface="D2Coding" panose="020B0609020101020101" pitchFamily="49" charset="-127"/>
+              </a:rPr>
+              <a:t>camel.npy</a:t>
+            </a:r>
+            <a:r>
+              <a:rPr lang="ko-KR" altLang="ko-KR" sz="1200" b="0" dirty="0">
+                <a:solidFill>
+                  <a:schemeClr val="tx1"/>
+                </a:solidFill>
+                <a:effectLst/>
+                <a:latin typeface="D2Coding" panose="020B0609020101020101" pitchFamily="49" charset="-127"/>
+                <a:ea typeface="D2Coding" panose="020B0609020101020101" pitchFamily="49" charset="-127"/>
+              </a:rPr>
+              <a:t>')</a:t>
+            </a:r>
+          </a:p>
+          <a:p>
+            <a:pPr>
+              <a:lnSpc>
+                <a:spcPct val="100000"/>
+              </a:lnSpc>
+              <a:buNone/>
+            </a:pPr>
+            <a:r>
+              <a:rPr lang="ko-KR" altLang="ko-KR" sz="1200" b="0" dirty="0" err="1">
+                <a:solidFill>
+                  <a:schemeClr val="tx1"/>
+                </a:solidFill>
+                <a:effectLst/>
+                <a:latin typeface="D2Coding" panose="020B0609020101020101" pitchFamily="49" charset="-127"/>
+                <a:ea typeface="D2Coding" panose="020B0609020101020101" pitchFamily="49" charset="-127"/>
+              </a:rPr>
+              <a:t>print</a:t>
+            </a:r>
+            <a:r>
+              <a:rPr lang="ko-KR" altLang="ko-KR" sz="1200" b="0" dirty="0">
+                <a:solidFill>
+                  <a:schemeClr val="tx1"/>
+                </a:solidFill>
+                <a:effectLst/>
+                <a:latin typeface="D2Coding" panose="020B0609020101020101" pitchFamily="49" charset="-127"/>
+                <a:ea typeface="D2Coding" panose="020B0609020101020101" pitchFamily="49" charset="-127"/>
+              </a:rPr>
+              <a:t>("데이터 </a:t>
+            </a:r>
+            <a:r>
+              <a:rPr lang="ko-KR" altLang="ko-KR" sz="1200" b="0" dirty="0" err="1">
+                <a:solidFill>
+                  <a:schemeClr val="tx1"/>
+                </a:solidFill>
+                <a:effectLst/>
+                <a:latin typeface="D2Coding" panose="020B0609020101020101" pitchFamily="49" charset="-127"/>
+                <a:ea typeface="D2Coding" panose="020B0609020101020101" pitchFamily="49" charset="-127"/>
+              </a:rPr>
+              <a:t>Shape</a:t>
+            </a:r>
+            <a:r>
+              <a:rPr lang="ko-KR" altLang="ko-KR" sz="1200" b="0" dirty="0">
+                <a:solidFill>
+                  <a:schemeClr val="tx1"/>
+                </a:solidFill>
+                <a:effectLst/>
+                <a:latin typeface="D2Coding" panose="020B0609020101020101" pitchFamily="49" charset="-127"/>
+                <a:ea typeface="D2Coding" panose="020B0609020101020101" pitchFamily="49" charset="-127"/>
+              </a:rPr>
+              <a:t>:", </a:t>
+            </a:r>
+            <a:r>
+              <a:rPr lang="ko-KR" altLang="ko-KR" sz="1200" b="0" dirty="0" err="1">
+                <a:solidFill>
+                  <a:schemeClr val="tx1"/>
+                </a:solidFill>
+                <a:effectLst/>
+                <a:latin typeface="D2Coding" panose="020B0609020101020101" pitchFamily="49" charset="-127"/>
+                <a:ea typeface="D2Coding" panose="020B0609020101020101" pitchFamily="49" charset="-127"/>
+              </a:rPr>
+              <a:t>camels.shape</a:t>
+            </a:r>
+            <a:r>
+              <a:rPr lang="ko-KR" altLang="ko-KR" sz="1200" b="0" dirty="0">
+                <a:solidFill>
+                  <a:schemeClr val="tx1"/>
+                </a:solidFill>
+                <a:effectLst/>
+                <a:latin typeface="D2Coding" panose="020B0609020101020101" pitchFamily="49" charset="-127"/>
+                <a:ea typeface="D2Coding" panose="020B0609020101020101" pitchFamily="49" charset="-127"/>
+              </a:rPr>
+              <a:t>)  # (샘플 수, 784)</a:t>
+            </a:r>
+          </a:p>
+          <a:p>
+            <a:pPr>
+              <a:lnSpc>
+                <a:spcPct val="100000"/>
+              </a:lnSpc>
+              <a:buNone/>
+            </a:pPr>
+            <a:endParaRPr lang="ko-KR" altLang="ko-KR" sz="1200" b="0" dirty="0">
+              <a:solidFill>
+                <a:schemeClr val="tx1"/>
+              </a:solidFill>
+              <a:effectLst/>
+              <a:latin typeface="D2Coding" panose="020B0609020101020101" pitchFamily="49" charset="-127"/>
+              <a:ea typeface="D2Coding" panose="020B0609020101020101" pitchFamily="49" charset="-127"/>
+            </a:endParaRPr>
+          </a:p>
+          <a:p>
+            <a:pPr>
+              <a:lnSpc>
+                <a:spcPct val="100000"/>
+              </a:lnSpc>
+              <a:buNone/>
+            </a:pPr>
+            <a:r>
+              <a:rPr lang="ko-KR" altLang="ko-KR" sz="1200" b="0" dirty="0">
+                <a:solidFill>
+                  <a:schemeClr val="tx1"/>
+                </a:solidFill>
+                <a:effectLst/>
+                <a:latin typeface="D2Coding" panose="020B0609020101020101" pitchFamily="49" charset="-127"/>
+                <a:ea typeface="D2Coding" panose="020B0609020101020101" pitchFamily="49" charset="-127"/>
+              </a:rPr>
+              <a:t># 3. 샘플 10개를 5행 2열(5 </a:t>
+            </a:r>
+            <a:r>
+              <a:rPr lang="ko-KR" altLang="ko-KR" sz="1200" b="0" dirty="0" err="1">
+                <a:solidFill>
+                  <a:schemeClr val="tx1"/>
+                </a:solidFill>
+                <a:effectLst/>
+                <a:latin typeface="D2Coding" panose="020B0609020101020101" pitchFamily="49" charset="-127"/>
+                <a:ea typeface="D2Coding" panose="020B0609020101020101" pitchFamily="49" charset="-127"/>
+              </a:rPr>
+              <a:t>by</a:t>
+            </a:r>
+            <a:r>
+              <a:rPr lang="ko-KR" altLang="ko-KR" sz="1200" b="0" dirty="0">
+                <a:solidFill>
+                  <a:schemeClr val="tx1"/>
+                </a:solidFill>
+                <a:effectLst/>
+                <a:latin typeface="D2Coding" panose="020B0609020101020101" pitchFamily="49" charset="-127"/>
+                <a:ea typeface="D2Coding" panose="020B0609020101020101" pitchFamily="49" charset="-127"/>
+              </a:rPr>
+              <a:t> 2) 그리드로 시각화</a:t>
+            </a:r>
+          </a:p>
+          <a:p>
+            <a:pPr>
+              <a:lnSpc>
+                <a:spcPct val="100000"/>
+              </a:lnSpc>
+              <a:buNone/>
+            </a:pPr>
+            <a:r>
+              <a:rPr lang="ko-KR" altLang="ko-KR" sz="1200" b="0" dirty="0" err="1">
+                <a:solidFill>
+                  <a:schemeClr val="tx1"/>
+                </a:solidFill>
+                <a:effectLst/>
+                <a:latin typeface="D2Coding" panose="020B0609020101020101" pitchFamily="49" charset="-127"/>
+                <a:ea typeface="D2Coding" panose="020B0609020101020101" pitchFamily="49" charset="-127"/>
+              </a:rPr>
+              <a:t>fig</a:t>
+            </a:r>
+            <a:r>
+              <a:rPr lang="ko-KR" altLang="ko-KR" sz="1200" b="0" dirty="0">
+                <a:solidFill>
+                  <a:schemeClr val="tx1"/>
+                </a:solidFill>
+                <a:effectLst/>
+                <a:latin typeface="D2Coding" panose="020B0609020101020101" pitchFamily="49" charset="-127"/>
+                <a:ea typeface="D2Coding" panose="020B0609020101020101" pitchFamily="49" charset="-127"/>
+              </a:rPr>
+              <a:t>, </a:t>
+            </a:r>
+            <a:r>
+              <a:rPr lang="ko-KR" altLang="ko-KR" sz="1200" b="0" dirty="0" err="1">
+                <a:solidFill>
+                  <a:schemeClr val="tx1"/>
+                </a:solidFill>
+                <a:effectLst/>
+                <a:latin typeface="D2Coding" panose="020B0609020101020101" pitchFamily="49" charset="-127"/>
+                <a:ea typeface="D2Coding" panose="020B0609020101020101" pitchFamily="49" charset="-127"/>
+              </a:rPr>
+              <a:t>axes</a:t>
+            </a:r>
+            <a:r>
+              <a:rPr lang="ko-KR" altLang="ko-KR" sz="1200" b="0" dirty="0">
+                <a:solidFill>
+                  <a:schemeClr val="tx1"/>
+                </a:solidFill>
+                <a:effectLst/>
+                <a:latin typeface="D2Coding" panose="020B0609020101020101" pitchFamily="49" charset="-127"/>
+                <a:ea typeface="D2Coding" panose="020B0609020101020101" pitchFamily="49" charset="-127"/>
+              </a:rPr>
+              <a:t> = </a:t>
+            </a:r>
+            <a:r>
+              <a:rPr lang="ko-KR" altLang="ko-KR" sz="1200" b="0" dirty="0" err="1">
+                <a:solidFill>
+                  <a:schemeClr val="tx1"/>
+                </a:solidFill>
+                <a:effectLst/>
+                <a:latin typeface="D2Coding" panose="020B0609020101020101" pitchFamily="49" charset="-127"/>
+                <a:ea typeface="D2Coding" panose="020B0609020101020101" pitchFamily="49" charset="-127"/>
+              </a:rPr>
+              <a:t>plt.subplots</a:t>
+            </a:r>
+            <a:r>
+              <a:rPr lang="ko-KR" altLang="ko-KR" sz="1200" b="0" dirty="0">
+                <a:solidFill>
+                  <a:schemeClr val="tx1"/>
+                </a:solidFill>
+                <a:effectLst/>
+                <a:latin typeface="D2Coding" panose="020B0609020101020101" pitchFamily="49" charset="-127"/>
+                <a:ea typeface="D2Coding" panose="020B0609020101020101" pitchFamily="49" charset="-127"/>
+              </a:rPr>
+              <a:t>(5, 3, </a:t>
+            </a:r>
+            <a:r>
+              <a:rPr lang="ko-KR" altLang="ko-KR" sz="1200" b="0" dirty="0" err="1">
+                <a:solidFill>
+                  <a:schemeClr val="tx1"/>
+                </a:solidFill>
+                <a:effectLst/>
+                <a:latin typeface="D2Coding" panose="020B0609020101020101" pitchFamily="49" charset="-127"/>
+                <a:ea typeface="D2Coding" panose="020B0609020101020101" pitchFamily="49" charset="-127"/>
+              </a:rPr>
+              <a:t>figsize</a:t>
+            </a:r>
+            <a:r>
+              <a:rPr lang="ko-KR" altLang="ko-KR" sz="1200" b="0" dirty="0">
+                <a:solidFill>
+                  <a:schemeClr val="tx1"/>
+                </a:solidFill>
+                <a:effectLst/>
+                <a:latin typeface="D2Coding" panose="020B0609020101020101" pitchFamily="49" charset="-127"/>
+                <a:ea typeface="D2Coding" panose="020B0609020101020101" pitchFamily="49" charset="-127"/>
+              </a:rPr>
+              <a:t>=(6, 12))</a:t>
+            </a:r>
+          </a:p>
+          <a:p>
+            <a:pPr>
+              <a:lnSpc>
+                <a:spcPct val="100000"/>
+              </a:lnSpc>
+              <a:buNone/>
+            </a:pPr>
+            <a:endParaRPr lang="ko-KR" altLang="ko-KR" sz="1200" b="0" dirty="0">
+              <a:solidFill>
+                <a:schemeClr val="tx1"/>
+              </a:solidFill>
+              <a:effectLst/>
+              <a:latin typeface="D2Coding" panose="020B0609020101020101" pitchFamily="49" charset="-127"/>
+              <a:ea typeface="D2Coding" panose="020B0609020101020101" pitchFamily="49" charset="-127"/>
+            </a:endParaRPr>
+          </a:p>
+          <a:p>
+            <a:pPr>
+              <a:lnSpc>
+                <a:spcPct val="100000"/>
+              </a:lnSpc>
+              <a:buNone/>
+            </a:pPr>
+            <a:r>
+              <a:rPr lang="ko-KR" altLang="ko-KR" sz="1200" b="0" dirty="0" err="1">
+                <a:solidFill>
+                  <a:schemeClr val="tx1"/>
+                </a:solidFill>
+                <a:effectLst/>
+                <a:latin typeface="D2Coding" panose="020B0609020101020101" pitchFamily="49" charset="-127"/>
+                <a:ea typeface="D2Coding" panose="020B0609020101020101" pitchFamily="49" charset="-127"/>
+              </a:rPr>
+              <a:t>for</a:t>
+            </a:r>
+            <a:r>
+              <a:rPr lang="ko-KR" altLang="ko-KR" sz="1200" b="0" dirty="0">
+                <a:solidFill>
+                  <a:schemeClr val="tx1"/>
+                </a:solidFill>
+                <a:effectLst/>
+                <a:latin typeface="D2Coding" panose="020B0609020101020101" pitchFamily="49" charset="-127"/>
+                <a:ea typeface="D2Coding" panose="020B0609020101020101" pitchFamily="49" charset="-127"/>
+              </a:rPr>
+              <a:t> </a:t>
+            </a:r>
+            <a:r>
+              <a:rPr lang="ko-KR" altLang="ko-KR" sz="1200" b="0" dirty="0" err="1">
+                <a:solidFill>
+                  <a:schemeClr val="tx1"/>
+                </a:solidFill>
+                <a:effectLst/>
+                <a:latin typeface="D2Coding" panose="020B0609020101020101" pitchFamily="49" charset="-127"/>
+                <a:ea typeface="D2Coding" panose="020B0609020101020101" pitchFamily="49" charset="-127"/>
+              </a:rPr>
+              <a:t>i</a:t>
+            </a:r>
+            <a:r>
+              <a:rPr lang="ko-KR" altLang="ko-KR" sz="1200" b="0" dirty="0">
+                <a:solidFill>
+                  <a:schemeClr val="tx1"/>
+                </a:solidFill>
+                <a:effectLst/>
+                <a:latin typeface="D2Coding" panose="020B0609020101020101" pitchFamily="49" charset="-127"/>
+                <a:ea typeface="D2Coding" panose="020B0609020101020101" pitchFamily="49" charset="-127"/>
+              </a:rPr>
+              <a:t>, </a:t>
+            </a:r>
+            <a:r>
+              <a:rPr lang="ko-KR" altLang="ko-KR" sz="1200" b="0" dirty="0" err="1">
+                <a:solidFill>
+                  <a:schemeClr val="tx1"/>
+                </a:solidFill>
+                <a:effectLst/>
+                <a:latin typeface="D2Coding" panose="020B0609020101020101" pitchFamily="49" charset="-127"/>
+                <a:ea typeface="D2Coding" panose="020B0609020101020101" pitchFamily="49" charset="-127"/>
+              </a:rPr>
+              <a:t>ax</a:t>
+            </a:r>
+            <a:r>
+              <a:rPr lang="ko-KR" altLang="ko-KR" sz="1200" b="0" dirty="0">
+                <a:solidFill>
+                  <a:schemeClr val="tx1"/>
+                </a:solidFill>
+                <a:effectLst/>
+                <a:latin typeface="D2Coding" panose="020B0609020101020101" pitchFamily="49" charset="-127"/>
+                <a:ea typeface="D2Coding" panose="020B0609020101020101" pitchFamily="49" charset="-127"/>
+              </a:rPr>
+              <a:t> </a:t>
+            </a:r>
+            <a:r>
+              <a:rPr lang="ko-KR" altLang="ko-KR" sz="1200" b="0" dirty="0" err="1">
+                <a:solidFill>
+                  <a:schemeClr val="tx1"/>
+                </a:solidFill>
+                <a:effectLst/>
+                <a:latin typeface="D2Coding" panose="020B0609020101020101" pitchFamily="49" charset="-127"/>
+                <a:ea typeface="D2Coding" panose="020B0609020101020101" pitchFamily="49" charset="-127"/>
+              </a:rPr>
+              <a:t>in</a:t>
+            </a:r>
+            <a:r>
+              <a:rPr lang="ko-KR" altLang="ko-KR" sz="1200" b="0" dirty="0">
+                <a:solidFill>
+                  <a:schemeClr val="tx1"/>
+                </a:solidFill>
+                <a:effectLst/>
+                <a:latin typeface="D2Coding" panose="020B0609020101020101" pitchFamily="49" charset="-127"/>
+                <a:ea typeface="D2Coding" panose="020B0609020101020101" pitchFamily="49" charset="-127"/>
+              </a:rPr>
+              <a:t> </a:t>
+            </a:r>
+            <a:r>
+              <a:rPr lang="ko-KR" altLang="ko-KR" sz="1200" b="0" dirty="0" err="1">
+                <a:solidFill>
+                  <a:schemeClr val="tx1"/>
+                </a:solidFill>
+                <a:effectLst/>
+                <a:latin typeface="D2Coding" panose="020B0609020101020101" pitchFamily="49" charset="-127"/>
+                <a:ea typeface="D2Coding" panose="020B0609020101020101" pitchFamily="49" charset="-127"/>
+              </a:rPr>
+              <a:t>enumerate</a:t>
+            </a:r>
+            <a:r>
+              <a:rPr lang="ko-KR" altLang="ko-KR" sz="1200" b="0" dirty="0">
+                <a:solidFill>
+                  <a:schemeClr val="tx1"/>
+                </a:solidFill>
+                <a:effectLst/>
+                <a:latin typeface="D2Coding" panose="020B0609020101020101" pitchFamily="49" charset="-127"/>
+                <a:ea typeface="D2Coding" panose="020B0609020101020101" pitchFamily="49" charset="-127"/>
+              </a:rPr>
+              <a:t>(</a:t>
+            </a:r>
+            <a:r>
+              <a:rPr lang="ko-KR" altLang="ko-KR" sz="1200" b="0" dirty="0" err="1">
+                <a:solidFill>
+                  <a:schemeClr val="tx1"/>
+                </a:solidFill>
+                <a:effectLst/>
+                <a:latin typeface="D2Coding" panose="020B0609020101020101" pitchFamily="49" charset="-127"/>
+                <a:ea typeface="D2Coding" panose="020B0609020101020101" pitchFamily="49" charset="-127"/>
+              </a:rPr>
+              <a:t>axes.flat</a:t>
+            </a:r>
+            <a:r>
+              <a:rPr lang="ko-KR" altLang="ko-KR" sz="1200" b="0" dirty="0">
+                <a:solidFill>
+                  <a:schemeClr val="tx1"/>
+                </a:solidFill>
+                <a:effectLst/>
+                <a:latin typeface="D2Coding" panose="020B0609020101020101" pitchFamily="49" charset="-127"/>
+                <a:ea typeface="D2Coding" panose="020B0609020101020101" pitchFamily="49" charset="-127"/>
+              </a:rPr>
+              <a:t>):</a:t>
+            </a:r>
+          </a:p>
+          <a:p>
+            <a:pPr>
+              <a:lnSpc>
+                <a:spcPct val="100000"/>
+              </a:lnSpc>
+              <a:buNone/>
+            </a:pPr>
+            <a:r>
+              <a:rPr lang="ko-KR" altLang="ko-KR" sz="1200" b="0" dirty="0">
+                <a:solidFill>
+                  <a:schemeClr val="tx1"/>
+                </a:solidFill>
+                <a:effectLst/>
+                <a:latin typeface="D2Coding" panose="020B0609020101020101" pitchFamily="49" charset="-127"/>
+                <a:ea typeface="D2Coding" panose="020B0609020101020101" pitchFamily="49" charset="-127"/>
+              </a:rPr>
+              <a:t>    # 784개 수치 데이터를 28x28 픽셀 이미지로 변환</a:t>
+            </a:r>
+          </a:p>
+          <a:p>
+            <a:pPr>
+              <a:lnSpc>
+                <a:spcPct val="100000"/>
+              </a:lnSpc>
+              <a:buNone/>
+            </a:pPr>
+            <a:r>
+              <a:rPr lang="ko-KR" altLang="ko-KR" sz="1200" b="0" dirty="0">
+                <a:solidFill>
+                  <a:schemeClr val="tx1"/>
+                </a:solidFill>
+                <a:effectLst/>
+                <a:latin typeface="D2Coding" panose="020B0609020101020101" pitchFamily="49" charset="-127"/>
+                <a:ea typeface="D2Coding" panose="020B0609020101020101" pitchFamily="49" charset="-127"/>
+              </a:rPr>
+              <a:t>    </a:t>
+            </a:r>
+            <a:r>
+              <a:rPr lang="ko-KR" altLang="ko-KR" sz="1200" b="0" dirty="0" err="1">
+                <a:solidFill>
+                  <a:schemeClr val="tx1"/>
+                </a:solidFill>
+                <a:effectLst/>
+                <a:latin typeface="D2Coding" panose="020B0609020101020101" pitchFamily="49" charset="-127"/>
+                <a:ea typeface="D2Coding" panose="020B0609020101020101" pitchFamily="49" charset="-127"/>
+              </a:rPr>
+              <a:t>img</a:t>
+            </a:r>
+            <a:r>
+              <a:rPr lang="ko-KR" altLang="ko-KR" sz="1200" b="0" dirty="0">
+                <a:solidFill>
+                  <a:schemeClr val="tx1"/>
+                </a:solidFill>
+                <a:effectLst/>
+                <a:latin typeface="D2Coding" panose="020B0609020101020101" pitchFamily="49" charset="-127"/>
+                <a:ea typeface="D2Coding" panose="020B0609020101020101" pitchFamily="49" charset="-127"/>
+              </a:rPr>
+              <a:t> = </a:t>
+            </a:r>
+            <a:r>
+              <a:rPr lang="ko-KR" altLang="ko-KR" sz="1200" b="0" dirty="0" err="1">
+                <a:solidFill>
+                  <a:schemeClr val="tx1"/>
+                </a:solidFill>
+                <a:effectLst/>
+                <a:latin typeface="D2Coding" panose="020B0609020101020101" pitchFamily="49" charset="-127"/>
+                <a:ea typeface="D2Coding" panose="020B0609020101020101" pitchFamily="49" charset="-127"/>
+              </a:rPr>
+              <a:t>camels</a:t>
+            </a:r>
+            <a:r>
+              <a:rPr lang="ko-KR" altLang="ko-KR" sz="1200" b="0" dirty="0">
+                <a:solidFill>
+                  <a:schemeClr val="tx1"/>
+                </a:solidFill>
+                <a:effectLst/>
+                <a:latin typeface="D2Coding" panose="020B0609020101020101" pitchFamily="49" charset="-127"/>
+                <a:ea typeface="D2Coding" panose="020B0609020101020101" pitchFamily="49" charset="-127"/>
+              </a:rPr>
+              <a:t>[</a:t>
+            </a:r>
+            <a:r>
+              <a:rPr lang="ko-KR" altLang="ko-KR" sz="1200" b="0" dirty="0" err="1">
+                <a:solidFill>
+                  <a:schemeClr val="tx1"/>
+                </a:solidFill>
+                <a:effectLst/>
+                <a:latin typeface="D2Coding" panose="020B0609020101020101" pitchFamily="49" charset="-127"/>
+                <a:ea typeface="D2Coding" panose="020B0609020101020101" pitchFamily="49" charset="-127"/>
+              </a:rPr>
+              <a:t>i</a:t>
+            </a:r>
+            <a:r>
+              <a:rPr lang="ko-KR" altLang="ko-KR" sz="1200" b="0" dirty="0">
+                <a:solidFill>
+                  <a:schemeClr val="tx1"/>
+                </a:solidFill>
+                <a:effectLst/>
+                <a:latin typeface="D2Coding" panose="020B0609020101020101" pitchFamily="49" charset="-127"/>
+                <a:ea typeface="D2Coding" panose="020B0609020101020101" pitchFamily="49" charset="-127"/>
+              </a:rPr>
+              <a:t>].</a:t>
+            </a:r>
+            <a:r>
+              <a:rPr lang="ko-KR" altLang="ko-KR" sz="1200" b="0" dirty="0" err="1">
+                <a:solidFill>
+                  <a:schemeClr val="tx1"/>
+                </a:solidFill>
+                <a:effectLst/>
+                <a:latin typeface="D2Coding" panose="020B0609020101020101" pitchFamily="49" charset="-127"/>
+                <a:ea typeface="D2Coding" panose="020B0609020101020101" pitchFamily="49" charset="-127"/>
+              </a:rPr>
+              <a:t>reshape</a:t>
+            </a:r>
+            <a:r>
+              <a:rPr lang="ko-KR" altLang="ko-KR" sz="1200" b="0" dirty="0">
+                <a:solidFill>
+                  <a:schemeClr val="tx1"/>
+                </a:solidFill>
+                <a:effectLst/>
+                <a:latin typeface="D2Coding" panose="020B0609020101020101" pitchFamily="49" charset="-127"/>
+                <a:ea typeface="D2Coding" panose="020B0609020101020101" pitchFamily="49" charset="-127"/>
+              </a:rPr>
+              <a:t>(28, 28)</a:t>
+            </a:r>
+          </a:p>
+          <a:p>
+            <a:pPr>
+              <a:lnSpc>
+                <a:spcPct val="100000"/>
+              </a:lnSpc>
+              <a:buNone/>
+            </a:pPr>
+            <a:r>
+              <a:rPr lang="ko-KR" altLang="ko-KR" sz="1200" b="0" dirty="0">
+                <a:solidFill>
+                  <a:schemeClr val="tx1"/>
+                </a:solidFill>
+                <a:effectLst/>
+                <a:latin typeface="D2Coding" panose="020B0609020101020101" pitchFamily="49" charset="-127"/>
+                <a:ea typeface="D2Coding" panose="020B0609020101020101" pitchFamily="49" charset="-127"/>
+              </a:rPr>
+              <a:t>    </a:t>
+            </a:r>
+          </a:p>
+          <a:p>
+            <a:pPr>
+              <a:lnSpc>
+                <a:spcPct val="100000"/>
+              </a:lnSpc>
+              <a:buNone/>
+            </a:pPr>
+            <a:r>
+              <a:rPr lang="ko-KR" altLang="ko-KR" sz="1200" b="0" dirty="0">
+                <a:solidFill>
+                  <a:schemeClr val="tx1"/>
+                </a:solidFill>
+                <a:effectLst/>
+                <a:latin typeface="D2Coding" panose="020B0609020101020101" pitchFamily="49" charset="-127"/>
+                <a:ea typeface="D2Coding" panose="020B0609020101020101" pitchFamily="49" charset="-127"/>
+              </a:rPr>
+              <a:t>    # </a:t>
+            </a:r>
+            <a:r>
+              <a:rPr lang="ko-KR" altLang="ko-KR" sz="1200" b="0" dirty="0" err="1">
+                <a:solidFill>
+                  <a:schemeClr val="tx1"/>
+                </a:solidFill>
+                <a:effectLst/>
+                <a:latin typeface="D2Coding" panose="020B0609020101020101" pitchFamily="49" charset="-127"/>
+                <a:ea typeface="D2Coding" panose="020B0609020101020101" pitchFamily="49" charset="-127"/>
+              </a:rPr>
+              <a:t>gray_r</a:t>
+            </a:r>
+            <a:r>
+              <a:rPr lang="ko-KR" altLang="ko-KR" sz="1200" b="0" dirty="0">
+                <a:solidFill>
+                  <a:schemeClr val="tx1"/>
+                </a:solidFill>
+                <a:effectLst/>
+                <a:latin typeface="D2Coding" panose="020B0609020101020101" pitchFamily="49" charset="-127"/>
+                <a:ea typeface="D2Coding" panose="020B0609020101020101" pitchFamily="49" charset="-127"/>
+              </a:rPr>
+              <a:t>: 흰 바탕에 검은색 선으로 표시</a:t>
+            </a:r>
+          </a:p>
+          <a:p>
+            <a:pPr>
+              <a:lnSpc>
+                <a:spcPct val="100000"/>
+              </a:lnSpc>
+              <a:buNone/>
+            </a:pPr>
+            <a:r>
+              <a:rPr lang="ko-KR" altLang="ko-KR" sz="1200" b="0" dirty="0">
+                <a:solidFill>
+                  <a:schemeClr val="tx1"/>
+                </a:solidFill>
+                <a:effectLst/>
+                <a:latin typeface="D2Coding" panose="020B0609020101020101" pitchFamily="49" charset="-127"/>
+                <a:ea typeface="D2Coding" panose="020B0609020101020101" pitchFamily="49" charset="-127"/>
+              </a:rPr>
+              <a:t>    </a:t>
+            </a:r>
+            <a:r>
+              <a:rPr lang="ko-KR" altLang="ko-KR" sz="1200" b="0" dirty="0" err="1">
+                <a:solidFill>
+                  <a:schemeClr val="tx1"/>
+                </a:solidFill>
+                <a:effectLst/>
+                <a:latin typeface="D2Coding" panose="020B0609020101020101" pitchFamily="49" charset="-127"/>
+                <a:ea typeface="D2Coding" panose="020B0609020101020101" pitchFamily="49" charset="-127"/>
+              </a:rPr>
+              <a:t>ax.imshow</a:t>
+            </a:r>
+            <a:r>
+              <a:rPr lang="ko-KR" altLang="ko-KR" sz="1200" b="0" dirty="0">
+                <a:solidFill>
+                  <a:schemeClr val="tx1"/>
+                </a:solidFill>
+                <a:effectLst/>
+                <a:latin typeface="D2Coding" panose="020B0609020101020101" pitchFamily="49" charset="-127"/>
+                <a:ea typeface="D2Coding" panose="020B0609020101020101" pitchFamily="49" charset="-127"/>
+              </a:rPr>
+              <a:t>(</a:t>
+            </a:r>
+            <a:r>
+              <a:rPr lang="ko-KR" altLang="ko-KR" sz="1200" b="0" dirty="0" err="1">
+                <a:solidFill>
+                  <a:schemeClr val="tx1"/>
+                </a:solidFill>
+                <a:effectLst/>
+                <a:latin typeface="D2Coding" panose="020B0609020101020101" pitchFamily="49" charset="-127"/>
+                <a:ea typeface="D2Coding" panose="020B0609020101020101" pitchFamily="49" charset="-127"/>
+              </a:rPr>
+              <a:t>img</a:t>
+            </a:r>
+            <a:r>
+              <a:rPr lang="ko-KR" altLang="ko-KR" sz="1200" b="0" dirty="0">
+                <a:solidFill>
+                  <a:schemeClr val="tx1"/>
+                </a:solidFill>
+                <a:effectLst/>
+                <a:latin typeface="D2Coding" panose="020B0609020101020101" pitchFamily="49" charset="-127"/>
+                <a:ea typeface="D2Coding" panose="020B0609020101020101" pitchFamily="49" charset="-127"/>
+              </a:rPr>
+              <a:t>, </a:t>
+            </a:r>
+            <a:r>
+              <a:rPr lang="ko-KR" altLang="ko-KR" sz="1200" b="0" dirty="0" err="1">
+                <a:solidFill>
+                  <a:schemeClr val="tx1"/>
+                </a:solidFill>
+                <a:effectLst/>
+                <a:latin typeface="D2Coding" panose="020B0609020101020101" pitchFamily="49" charset="-127"/>
+                <a:ea typeface="D2Coding" panose="020B0609020101020101" pitchFamily="49" charset="-127"/>
+              </a:rPr>
+              <a:t>cmap</a:t>
+            </a:r>
+            <a:r>
+              <a:rPr lang="ko-KR" altLang="ko-KR" sz="1200" b="0" dirty="0">
+                <a:solidFill>
+                  <a:schemeClr val="tx1"/>
+                </a:solidFill>
+                <a:effectLst/>
+                <a:latin typeface="D2Coding" panose="020B0609020101020101" pitchFamily="49" charset="-127"/>
+                <a:ea typeface="D2Coding" panose="020B0609020101020101" pitchFamily="49" charset="-127"/>
+              </a:rPr>
+              <a:t>='</a:t>
+            </a:r>
+            <a:r>
+              <a:rPr lang="ko-KR" altLang="ko-KR" sz="1200" b="0" dirty="0" err="1">
+                <a:solidFill>
+                  <a:schemeClr val="tx1"/>
+                </a:solidFill>
+                <a:effectLst/>
+                <a:latin typeface="D2Coding" panose="020B0609020101020101" pitchFamily="49" charset="-127"/>
+                <a:ea typeface="D2Coding" panose="020B0609020101020101" pitchFamily="49" charset="-127"/>
+              </a:rPr>
+              <a:t>gray_r</a:t>
+            </a:r>
+            <a:r>
+              <a:rPr lang="ko-KR" altLang="ko-KR" sz="1200" b="0" dirty="0">
+                <a:solidFill>
+                  <a:schemeClr val="tx1"/>
+                </a:solidFill>
+                <a:effectLst/>
+                <a:latin typeface="D2Coding" panose="020B0609020101020101" pitchFamily="49" charset="-127"/>
+                <a:ea typeface="D2Coding" panose="020B0609020101020101" pitchFamily="49" charset="-127"/>
+              </a:rPr>
+              <a:t>')</a:t>
+            </a:r>
+          </a:p>
+          <a:p>
+            <a:pPr>
+              <a:lnSpc>
+                <a:spcPct val="100000"/>
+              </a:lnSpc>
+              <a:buNone/>
+            </a:pPr>
+            <a:r>
+              <a:rPr lang="ko-KR" altLang="ko-KR" sz="1200" b="0" dirty="0">
+                <a:solidFill>
+                  <a:schemeClr val="tx1"/>
+                </a:solidFill>
+                <a:effectLst/>
+                <a:latin typeface="D2Coding" panose="020B0609020101020101" pitchFamily="49" charset="-127"/>
+                <a:ea typeface="D2Coding" panose="020B0609020101020101" pitchFamily="49" charset="-127"/>
+              </a:rPr>
+              <a:t>    </a:t>
+            </a:r>
+            <a:r>
+              <a:rPr lang="ko-KR" altLang="ko-KR" sz="1200" b="0" dirty="0" err="1">
+                <a:solidFill>
+                  <a:schemeClr val="tx1"/>
+                </a:solidFill>
+                <a:effectLst/>
+                <a:latin typeface="D2Coding" panose="020B0609020101020101" pitchFamily="49" charset="-127"/>
+                <a:ea typeface="D2Coding" panose="020B0609020101020101" pitchFamily="49" charset="-127"/>
+              </a:rPr>
+              <a:t>ax.set_title</a:t>
+            </a:r>
+            <a:r>
+              <a:rPr lang="ko-KR" altLang="ko-KR" sz="1200" b="0" dirty="0">
+                <a:solidFill>
+                  <a:schemeClr val="tx1"/>
+                </a:solidFill>
+                <a:effectLst/>
+                <a:latin typeface="D2Coding" panose="020B0609020101020101" pitchFamily="49" charset="-127"/>
+                <a:ea typeface="D2Coding" panose="020B0609020101020101" pitchFamily="49" charset="-127"/>
+              </a:rPr>
+              <a:t>(</a:t>
+            </a:r>
+            <a:r>
+              <a:rPr lang="ko-KR" altLang="ko-KR" sz="1200" b="0" dirty="0" err="1">
+                <a:solidFill>
+                  <a:schemeClr val="tx1"/>
+                </a:solidFill>
+                <a:effectLst/>
+                <a:latin typeface="D2Coding" panose="020B0609020101020101" pitchFamily="49" charset="-127"/>
+                <a:ea typeface="D2Coding" panose="020B0609020101020101" pitchFamily="49" charset="-127"/>
+              </a:rPr>
+              <a:t>f'Camel</a:t>
+            </a:r>
+            <a:r>
+              <a:rPr lang="ko-KR" altLang="ko-KR" sz="1200" b="0" dirty="0">
+                <a:solidFill>
+                  <a:schemeClr val="tx1"/>
+                </a:solidFill>
+                <a:effectLst/>
+                <a:latin typeface="D2Coding" panose="020B0609020101020101" pitchFamily="49" charset="-127"/>
+                <a:ea typeface="D2Coding" panose="020B0609020101020101" pitchFamily="49" charset="-127"/>
+              </a:rPr>
+              <a:t> #{i+1}')</a:t>
+            </a:r>
+          </a:p>
+          <a:p>
+            <a:pPr>
+              <a:lnSpc>
+                <a:spcPct val="100000"/>
+              </a:lnSpc>
+              <a:buNone/>
+            </a:pPr>
+            <a:r>
+              <a:rPr lang="ko-KR" altLang="ko-KR" sz="1200" b="0" dirty="0">
+                <a:solidFill>
+                  <a:schemeClr val="tx1"/>
+                </a:solidFill>
+                <a:effectLst/>
+                <a:latin typeface="D2Coding" panose="020B0609020101020101" pitchFamily="49" charset="-127"/>
+                <a:ea typeface="D2Coding" panose="020B0609020101020101" pitchFamily="49" charset="-127"/>
+              </a:rPr>
+              <a:t>    </a:t>
+            </a:r>
+            <a:r>
+              <a:rPr lang="ko-KR" altLang="ko-KR" sz="1200" b="0" dirty="0" err="1">
+                <a:solidFill>
+                  <a:schemeClr val="tx1"/>
+                </a:solidFill>
+                <a:effectLst/>
+                <a:latin typeface="D2Coding" panose="020B0609020101020101" pitchFamily="49" charset="-127"/>
+                <a:ea typeface="D2Coding" panose="020B0609020101020101" pitchFamily="49" charset="-127"/>
+              </a:rPr>
+              <a:t>ax.axis</a:t>
+            </a:r>
+            <a:r>
+              <a:rPr lang="ko-KR" altLang="ko-KR" sz="1200" b="0" dirty="0">
+                <a:solidFill>
+                  <a:schemeClr val="tx1"/>
+                </a:solidFill>
+                <a:effectLst/>
+                <a:latin typeface="D2Coding" panose="020B0609020101020101" pitchFamily="49" charset="-127"/>
+                <a:ea typeface="D2Coding" panose="020B0609020101020101" pitchFamily="49" charset="-127"/>
+              </a:rPr>
+              <a:t>('</a:t>
+            </a:r>
+            <a:r>
+              <a:rPr lang="ko-KR" altLang="ko-KR" sz="1200" b="0" dirty="0" err="1">
+                <a:solidFill>
+                  <a:schemeClr val="tx1"/>
+                </a:solidFill>
+                <a:effectLst/>
+                <a:latin typeface="D2Coding" panose="020B0609020101020101" pitchFamily="49" charset="-127"/>
+                <a:ea typeface="D2Coding" panose="020B0609020101020101" pitchFamily="49" charset="-127"/>
+              </a:rPr>
+              <a:t>off</a:t>
+            </a:r>
+            <a:r>
+              <a:rPr lang="ko-KR" altLang="ko-KR" sz="1200" b="0" dirty="0">
+                <a:solidFill>
+                  <a:schemeClr val="tx1"/>
+                </a:solidFill>
+                <a:effectLst/>
+                <a:latin typeface="D2Coding" panose="020B0609020101020101" pitchFamily="49" charset="-127"/>
+                <a:ea typeface="D2Coding" panose="020B0609020101020101" pitchFamily="49" charset="-127"/>
+              </a:rPr>
+              <a:t>')  # 축 눈금 숨기기</a:t>
+            </a:r>
+          </a:p>
+          <a:p>
+            <a:pPr>
+              <a:lnSpc>
+                <a:spcPct val="100000"/>
+              </a:lnSpc>
+              <a:buNone/>
+            </a:pPr>
+            <a:endParaRPr lang="ko-KR" altLang="ko-KR" sz="1200" b="0" dirty="0">
+              <a:solidFill>
+                <a:schemeClr val="tx1"/>
+              </a:solidFill>
+              <a:effectLst/>
+              <a:latin typeface="D2Coding" panose="020B0609020101020101" pitchFamily="49" charset="-127"/>
+              <a:ea typeface="D2Coding" panose="020B0609020101020101" pitchFamily="49" charset="-127"/>
+            </a:endParaRPr>
+          </a:p>
+          <a:p>
+            <a:pPr>
+              <a:lnSpc>
+                <a:spcPct val="100000"/>
+              </a:lnSpc>
+              <a:buNone/>
+            </a:pPr>
+            <a:r>
+              <a:rPr lang="ko-KR" altLang="ko-KR" sz="1200" b="0" dirty="0" err="1">
+                <a:solidFill>
+                  <a:schemeClr val="tx1"/>
+                </a:solidFill>
+                <a:effectLst/>
+                <a:latin typeface="D2Coding" panose="020B0609020101020101" pitchFamily="49" charset="-127"/>
+                <a:ea typeface="D2Coding" panose="020B0609020101020101" pitchFamily="49" charset="-127"/>
+              </a:rPr>
+              <a:t>plt.tight_layout</a:t>
+            </a:r>
+            <a:r>
+              <a:rPr lang="ko-KR" altLang="ko-KR" sz="1200" b="0" dirty="0">
+                <a:solidFill>
+                  <a:schemeClr val="tx1"/>
+                </a:solidFill>
+                <a:effectLst/>
+                <a:latin typeface="D2Coding" panose="020B0609020101020101" pitchFamily="49" charset="-127"/>
+                <a:ea typeface="D2Coding" panose="020B0609020101020101" pitchFamily="49" charset="-127"/>
+              </a:rPr>
+              <a:t>()</a:t>
+            </a:r>
+          </a:p>
+          <a:p>
+            <a:pPr>
+              <a:lnSpc>
+                <a:spcPct val="100000"/>
+              </a:lnSpc>
+              <a:buNone/>
+            </a:pPr>
+            <a:r>
+              <a:rPr lang="ko-KR" altLang="ko-KR" sz="1200" b="0" dirty="0" err="1">
+                <a:solidFill>
+                  <a:schemeClr val="tx1"/>
+                </a:solidFill>
+                <a:effectLst/>
+                <a:latin typeface="D2Coding" panose="020B0609020101020101" pitchFamily="49" charset="-127"/>
+                <a:ea typeface="D2Coding" panose="020B0609020101020101" pitchFamily="49" charset="-127"/>
+              </a:rPr>
+              <a:t>plt.show</a:t>
+            </a:r>
+            <a:r>
+              <a:rPr lang="ko-KR" altLang="ko-KR" sz="1200" b="0" dirty="0">
+                <a:solidFill>
+                  <a:schemeClr val="tx1"/>
+                </a:solidFill>
+                <a:effectLst/>
+                <a:latin typeface="D2Coding" panose="020B0609020101020101" pitchFamily="49" charset="-127"/>
+                <a:ea typeface="D2Coding" panose="020B0609020101020101" pitchFamily="49" charset="-127"/>
+              </a:rPr>
+              <a:t>()</a:t>
+            </a:r>
+            <a:endParaRPr lang="ko-KR" altLang="ko-KR" sz="1000" b="0" dirty="0">
+              <a:solidFill>
+                <a:srgbClr val="D4D4D4"/>
+              </a:solidFill>
+              <a:effectLst/>
+              <a:latin typeface="D2Coding" panose="020B0609020101020101" pitchFamily="49" charset="-127"/>
+              <a:ea typeface="D2Coding" panose="020B0609020101020101" pitchFamily="49" charset="-127"/>
+            </a:endParaRPr>
+          </a:p>
+        </p:txBody>
+      </p:sp>
+    </p:spTree>
+    <p:extLst>
+      <p:ext uri="{BB962C8B-B14F-4D97-AF65-F5344CB8AC3E}">
+        <p14:creationId xmlns:p14="http://schemas.microsoft.com/office/powerpoint/2010/main" val="725002941"/>
+      </p:ext>
+    </p:extLst>
+  </p:cSld>
+  <p:clrMapOvr>
+    <a:masterClrMapping/>
+  </p:clrMapOvr>
+</p:sld>
+</file>
+
+<file path=ppt/slides/slide6.xml><?xml version="1.0" encoding="utf-8"?>
+<p:sld xmlns:a="http://schemas.openxmlformats.org/drawingml/2006/main" xmlns:r="http://schemas.openxmlformats.org/officeDocument/2006/relationships" xmlns:p="http://schemas.openxmlformats.org/presentationml/2006/main">
+  <p:cSld>
+    <p:spTree>
+      <p:nvGrpSpPr>
+        <p:cNvPr id="1" name="">
+          <a:extLst>
+            <a:ext uri="{FF2B5EF4-FFF2-40B4-BE49-F238E27FC236}">
               <a16:creationId xmlns:a16="http://schemas.microsoft.com/office/drawing/2014/main" id="{59FEB2D9-971D-12D3-B060-10E8E3F65686}"/>
             </a:ext>
           </a:extLst>
@@ -3430,7 +6105,7 @@
 </p:sld>
 </file>
 
-<file path=ppt/slides/slide4.xml><?xml version="1.0" encoding="utf-8"?>
+<file path=ppt/slides/slide7.xml><?xml version="1.0" encoding="utf-8"?>
 <p:sld xmlns:a="http://schemas.openxmlformats.org/drawingml/2006/main" xmlns:r="http://schemas.openxmlformats.org/officeDocument/2006/relationships" xmlns:p="http://schemas.openxmlformats.org/presentationml/2006/main">
   <p:cSld>
     <p:spTree>
@@ -4367,7 +7042,7 @@
 </p:sld>
 </file>
 
-<file path=ppt/slides/slide5.xml><?xml version="1.0" encoding="utf-8"?>
+<file path=ppt/slides/slide8.xml><?xml version="1.0" encoding="utf-8"?>
 <p:sld xmlns:a="http://schemas.openxmlformats.org/drawingml/2006/main" xmlns:r="http://schemas.openxmlformats.org/officeDocument/2006/relationships" xmlns:p="http://schemas.openxmlformats.org/presentationml/2006/main">
   <p:cSld>
     <p:spTree>

--- a/Generative Adversarial Networks.pptx
+++ b/Generative Adversarial Networks.pptx
@@ -5,10 +5,10 @@
     <p:sldMasterId id="2147483660" r:id="rId1"/>
   </p:sldMasterIdLst>
   <p:notesMasterIdLst>
-    <p:notesMasterId r:id="rId10"/>
+    <p:notesMasterId r:id="rId11"/>
   </p:notesMasterIdLst>
   <p:handoutMasterIdLst>
-    <p:handoutMasterId r:id="rId11"/>
+    <p:handoutMasterId r:id="rId12"/>
   </p:handoutMasterIdLst>
   <p:sldIdLst>
     <p:sldId id="256" r:id="rId2"/>
@@ -19,6 +19,7 @@
     <p:sldId id="1379" r:id="rId7"/>
     <p:sldId id="1378" r:id="rId8"/>
     <p:sldId id="1380" r:id="rId9"/>
+    <p:sldId id="1384" r:id="rId10"/>
   </p:sldIdLst>
   <p:sldSz cx="12192000" cy="6858000"/>
   <p:notesSz cx="6858000" cy="9144000"/>
@@ -134,6 +135,7 @@
             <p14:sldId id="1379"/>
             <p14:sldId id="1378"/>
             <p14:sldId id="1380"/>
+            <p14:sldId id="1384"/>
           </p14:sldIdLst>
         </p14:section>
         <p14:section name="자세한 정보" id="{2CC34DB2-6590-42C0-AD4B-A04C6060184E}">
@@ -7200,6 +7202,147 @@
     <p:extLst>
       <p:ext uri="{BB962C8B-B14F-4D97-AF65-F5344CB8AC3E}">
         <p14:creationId xmlns:p14="http://schemas.microsoft.com/office/powerpoint/2010/main" val="3135614386"/>
+      </p:ext>
+    </p:extLst>
+  </p:cSld>
+  <p:clrMapOvr>
+    <a:masterClrMapping/>
+  </p:clrMapOvr>
+</p:sld>
+</file>
+
+<file path=ppt/slides/slide9.xml><?xml version="1.0" encoding="utf-8"?>
+<p:sld xmlns:a="http://schemas.openxmlformats.org/drawingml/2006/main" xmlns:r="http://schemas.openxmlformats.org/officeDocument/2006/relationships" xmlns:p="http://schemas.openxmlformats.org/presentationml/2006/main">
+  <p:cSld>
+    <p:spTree>
+      <p:nvGrpSpPr>
+        <p:cNvPr id="1" name="">
+          <a:extLst>
+            <a:ext uri="{FF2B5EF4-FFF2-40B4-BE49-F238E27FC236}">
+              <a16:creationId xmlns:a16="http://schemas.microsoft.com/office/drawing/2014/main" id="{1D9A1643-5104-25D4-61C2-551EA0CE67B7}"/>
+            </a:ext>
+          </a:extLst>
+        </p:cNvPr>
+        <p:cNvGrpSpPr/>
+        <p:nvPr/>
+      </p:nvGrpSpPr>
+      <p:grpSpPr>
+        <a:xfrm>
+          <a:off x="0" y="0"/>
+          <a:ext cx="0" cy="0"/>
+          <a:chOff x="0" y="0"/>
+          <a:chExt cx="0" cy="0"/>
+        </a:xfrm>
+      </p:grpSpPr>
+      <p:sp>
+        <p:nvSpPr>
+          <p:cNvPr id="3" name="제목 1">
+            <a:extLst>
+              <a:ext uri="{FF2B5EF4-FFF2-40B4-BE49-F238E27FC236}">
+                <a16:creationId xmlns:a16="http://schemas.microsoft.com/office/drawing/2014/main" id="{B7E28E8C-37DC-8F11-3B55-1528114A17CC}"/>
+              </a:ext>
+            </a:extLst>
+          </p:cNvPr>
+          <p:cNvSpPr txBox="1">
+            <a:spLocks/>
+          </p:cNvSpPr>
+          <p:nvPr/>
+        </p:nvSpPr>
+        <p:spPr>
+          <a:xfrm>
+            <a:off x="475645" y="481983"/>
+            <a:ext cx="10353762" cy="766439"/>
+          </a:xfrm>
+          <a:prstGeom prst="rect">
+            <a:avLst/>
+          </a:prstGeom>
+        </p:spPr>
+        <p:txBody>
+          <a:bodyPr vert="horz" lIns="91440" tIns="45720" rIns="91440" bIns="45720" rtlCol="0" anchor="ctr">
+            <a:normAutofit fontScale="92500"/>
+          </a:bodyPr>
+          <a:lstStyle>
+            <a:lvl1pPr algn="ctr" defTabSz="914400" rtl="0" eaLnBrk="1" latinLnBrk="1" hangingPunct="1">
+              <a:lnSpc>
+                <a:spcPct val="90000"/>
+              </a:lnSpc>
+              <a:spcBef>
+                <a:spcPct val="0"/>
+              </a:spcBef>
+              <a:buNone/>
+              <a:defRPr sz="3200" kern="1200" cap="all" baseline="0">
+                <a:solidFill>
+                  <a:schemeClr val="tx1"/>
+                </a:solidFill>
+                <a:effectLst/>
+                <a:latin typeface="Batang" panose="02030600000101010101" pitchFamily="18" charset="-127"/>
+                <a:ea typeface="Batang" panose="02030600000101010101" pitchFamily="18" charset="-127"/>
+                <a:cs typeface="+mj-cs"/>
+              </a:defRPr>
+            </a:lvl1pPr>
+          </a:lstStyle>
+          <a:p>
+            <a:pPr algn="l"/>
+            <a:r>
+              <a:rPr lang="en-US" altLang="ko-KR" sz="2800" cap="none" dirty="0">
+                <a:solidFill>
+                  <a:schemeClr val="bg2">
+                    <a:lumMod val="25000"/>
+                  </a:schemeClr>
+                </a:solidFill>
+                <a:latin typeface="D2Coding" panose="020B0609020101020101" pitchFamily="49" charset="-127"/>
+                <a:ea typeface="D2Coding" panose="020B0609020101020101" pitchFamily="49" charset="-127"/>
+                <a:cs typeface="Segoe UI Light" panose="020B0502040204020203" pitchFamily="34" charset="0"/>
+              </a:rPr>
+              <a:t>Output from the generator at specific epochs during training</a:t>
+            </a:r>
+            <a:endParaRPr lang="ko-KR" altLang="en-US" sz="2800" cap="none" dirty="0">
+              <a:solidFill>
+                <a:schemeClr val="bg2">
+                  <a:lumMod val="25000"/>
+                </a:schemeClr>
+              </a:solidFill>
+              <a:latin typeface="D2Coding" panose="020B0609020101020101" pitchFamily="49" charset="-127"/>
+              <a:ea typeface="D2Coding" panose="020B0609020101020101" pitchFamily="49" charset="-127"/>
+              <a:cs typeface="Segoe UI Light" panose="020B0502040204020203" pitchFamily="34" charset="0"/>
+            </a:endParaRPr>
+          </a:p>
+        </p:txBody>
+      </p:sp>
+      <p:pic>
+        <p:nvPicPr>
+          <p:cNvPr id="6" name="그림 5">
+            <a:extLst>
+              <a:ext uri="{FF2B5EF4-FFF2-40B4-BE49-F238E27FC236}">
+                <a16:creationId xmlns:a16="http://schemas.microsoft.com/office/drawing/2014/main" id="{77FEC574-7250-C434-8AE3-AB5D0AAD7F10}"/>
+              </a:ext>
+            </a:extLst>
+          </p:cNvPr>
+          <p:cNvPicPr>
+            <a:picLocks noChangeAspect="1"/>
+          </p:cNvPicPr>
+          <p:nvPr/>
+        </p:nvPicPr>
+        <p:blipFill>
+          <a:blip r:embed="rId2"/>
+          <a:stretch>
+            <a:fillRect/>
+          </a:stretch>
+        </p:blipFill>
+        <p:spPr>
+          <a:xfrm>
+            <a:off x="2947798" y="1431852"/>
+            <a:ext cx="4763165" cy="4944165"/>
+          </a:xfrm>
+          <a:prstGeom prst="rect">
+            <a:avLst/>
+          </a:prstGeom>
+        </p:spPr>
+      </p:pic>
+    </p:spTree>
+    <p:extLst>
+      <p:ext uri="{BB962C8B-B14F-4D97-AF65-F5344CB8AC3E}">
+        <p14:creationId xmlns:p14="http://schemas.microsoft.com/office/powerpoint/2010/main" val="1756670554"/>
       </p:ext>
     </p:extLst>
   </p:cSld>
